--- a/Gold_Analysis_Agent_Presentation.pptx
+++ b/Gold_Analysis_Agent_Presentation.pptx
@@ -5,7 +5,7 @@
     <p:sldMasterId id="2147483648" r:id="rId1"/>
   </p:sldMasterIdLst>
   <p:notesMasterIdLst>
-    <p:notesMasterId r:id="rId16"/>
+    <p:notesMasterId r:id="rId18"/>
   </p:notesMasterIdLst>
   <p:sldIdLst>
     <p:sldId id="256" r:id="rId2"/>
@@ -17,11 +17,13 @@
     <p:sldId id="261" r:id="rId8"/>
     <p:sldId id="262" r:id="rId9"/>
     <p:sldId id="263" r:id="rId10"/>
-    <p:sldId id="264" r:id="rId11"/>
-    <p:sldId id="265" r:id="rId12"/>
-    <p:sldId id="266" r:id="rId13"/>
-    <p:sldId id="267" r:id="rId14"/>
-    <p:sldId id="268" r:id="rId15"/>
+    <p:sldId id="271" r:id="rId11"/>
+    <p:sldId id="264" r:id="rId12"/>
+    <p:sldId id="265" r:id="rId13"/>
+    <p:sldId id="272" r:id="rId14"/>
+    <p:sldId id="266" r:id="rId15"/>
+    <p:sldId id="267" r:id="rId16"/>
+    <p:sldId id="268" r:id="rId17"/>
   </p:sldIdLst>
   <p:sldSz cx="9144000" cy="6858000" type="screen4x3"/>
   <p:notesSz cx="6858000" cy="9144000"/>
@@ -3617,7 +3619,13 @@
       </p:grpSpPr>
       <p:sp>
         <p:nvSpPr>
-          <p:cNvPr id="2" name="Title 1"/>
+          <p:cNvPr id="2" name="Title 1">
+            <a:extLst>
+              <a:ext uri="{FF2B5EF4-FFF2-40B4-BE49-F238E27FC236}">
+                <a16:creationId xmlns:a16="http://schemas.microsoft.com/office/drawing/2014/main" id="{ACAB6D95-70C6-CF7F-571D-A0AF4C64CFF4}"/>
+              </a:ext>
+            </a:extLst>
+          </p:cNvPr>
           <p:cNvSpPr>
             <a:spLocks noGrp="1"/>
           </p:cNvSpPr>
@@ -3625,12 +3633,20 @@
             <p:ph type="title"/>
           </p:nvPr>
         </p:nvSpPr>
-        <p:spPr/>
-        <p:txBody>
-          <a:bodyPr/>
+        <p:spPr>
+          <a:xfrm>
+            <a:off x="457200" y="274638"/>
+            <a:ext cx="8229600" cy="557875"/>
+          </a:xfrm>
+        </p:spPr>
+        <p:txBody>
+          <a:bodyPr>
+            <a:normAutofit fontScale="90000"/>
+          </a:bodyPr>
           <a:lstStyle/>
           <a:p>
             <a:r>
+              <a:rPr lang="en-US" dirty="0"/>
               <a:t>Sample Prompt #1</a:t>
             </a:r>
           </a:p>
@@ -3638,7 +3654,13 @@
       </p:sp>
       <p:sp>
         <p:nvSpPr>
-          <p:cNvPr id="3" name="Content Placeholder 2"/>
+          <p:cNvPr id="3" name="Content Placeholder 2">
+            <a:extLst>
+              <a:ext uri="{FF2B5EF4-FFF2-40B4-BE49-F238E27FC236}">
+                <a16:creationId xmlns:a16="http://schemas.microsoft.com/office/drawing/2014/main" id="{15399CFD-B49F-DB41-4D3E-0C4B08754192}"/>
+              </a:ext>
+            </a:extLst>
+          </p:cNvPr>
           <p:cNvSpPr>
             <a:spLocks noGrp="1"/>
           </p:cNvSpPr>
@@ -3646,19 +3668,131 @@
             <p:ph idx="1"/>
           </p:nvPr>
         </p:nvSpPr>
-        <p:spPr/>
-        <p:txBody>
-          <a:bodyPr/>
+        <p:spPr>
+          <a:xfrm>
+            <a:off x="310486" y="1045737"/>
+            <a:ext cx="8710684" cy="5537625"/>
+          </a:xfrm>
+        </p:spPr>
+        <p:txBody>
+          <a:bodyPr>
+            <a:normAutofit fontScale="92500" lnSpcReduction="10000"/>
+          </a:bodyPr>
           <a:lstStyle/>
           <a:p>
             <a:r>
-              <a:t>Q: What is the outlook for gold this week?</a:t>
-            </a:r>
-          </a:p>
-          <a:p>
-            <a:r>
-              <a:t>A: Gold shows a mildly bullish outlook due to interest-rate expectations and safe-haven demand.</a:t>
-            </a:r>
+              <a:rPr lang="en-US" sz="1600" dirty="0"/>
+              <a:t>Q: What impact is the current strength of the US Dollar Index (DXY) having on gold?</a:t>
+            </a:r>
+          </a:p>
+          <a:p>
+            <a:r>
+              <a:rPr lang="en-US" sz="1600" dirty="0"/>
+              <a:t>A:  The current strength of the US Dollar Index (DXY) is exerting downward pressure on gold prices.</a:t>
+            </a:r>
+          </a:p>
+          <a:p>
+            <a:r>
+              <a:rPr lang="en-US" sz="1600" b="1" dirty="0"/>
+              <a:t>Market Trend:</a:t>
+            </a:r>
+            <a:r>
+              <a:rPr lang="en-US" sz="1600" dirty="0"/>
+              <a:t> Gold prices have experienced a significant decline, tumbling more than 3% to below $4,000 per ounce, reaching their lowest level since November 2025. The weekly change for gold shows a decrease of 3.06%.</a:t>
+            </a:r>
+          </a:p>
+          <a:p>
+            <a:r>
+              <a:rPr lang="en-US" sz="1600" b="1" dirty="0"/>
+              <a:t>Key Drivers:</a:t>
+            </a:r>
+            <a:endParaRPr lang="en-US" sz="1600" dirty="0"/>
+          </a:p>
+          <a:p>
+            <a:pPr lvl="1"/>
+            <a:r>
+              <a:rPr lang="en-US" sz="1400" b="1" dirty="0"/>
+              <a:t>Stronger US Dollar:</a:t>
+            </a:r>
+            <a:r>
+              <a:rPr lang="en-US" sz="1400" dirty="0"/>
+              <a:t> A stronger dollar generally makes gold, which is priced in dollars, more expensive for holders of other currencies, thus reducing demand. The DXY itself has shown upward movement in some data points.</a:t>
+            </a:r>
+          </a:p>
+          <a:p>
+            <a:pPr lvl="1"/>
+            <a:r>
+              <a:rPr lang="en-US" sz="1400" b="1" dirty="0"/>
+              <a:t>Hawkish Fed Expectations:</a:t>
+            </a:r>
+            <a:r>
+              <a:rPr lang="en-US" sz="1400" dirty="0"/>
+              <a:t> Growing expectations of further interest rate hikes by the Federal Reserve are a significant driver. Markets are increasingly pricing in a Fed rate hike in September, which increases the attractiveness of dollar-denominated assets and higher-yielding investments over non-yielding gold. The traditional inverse relationship between interest rates and gold prices is highlighted in the provided news.</a:t>
+            </a:r>
+          </a:p>
+          <a:p>
+            <a:pPr lvl="1"/>
+            <a:r>
+              <a:rPr lang="en-US" sz="1400" b="1" dirty="0"/>
+              <a:t>Diminished Safe-Haven Appeal:</a:t>
+            </a:r>
+            <a:r>
+              <a:rPr lang="en-US" sz="1400" dirty="0"/>
+              <a:t> Despite geopolitical uncertainties, gold has struggled to act as a traditional safe haven, further contributing to its price weakness.</a:t>
+            </a:r>
+          </a:p>
+          <a:p>
+            <a:r>
+              <a:rPr lang="en-US" sz="1600" b="1" dirty="0"/>
+              <a:t>Risks:</a:t>
+            </a:r>
+            <a:endParaRPr lang="en-US" sz="1600" dirty="0"/>
+          </a:p>
+          <a:p>
+            <a:pPr lvl="1"/>
+            <a:r>
+              <a:rPr lang="en-US" sz="1400" b="1" dirty="0"/>
+              <a:t>Further Dollar Strength:</a:t>
+            </a:r>
+            <a:r>
+              <a:rPr lang="en-US" sz="1400" dirty="0"/>
+              <a:t> Continued appreciation of the US Dollar could lead to further price erosion for gold.</a:t>
+            </a:r>
+          </a:p>
+          <a:p>
+            <a:pPr lvl="1"/>
+            <a:r>
+              <a:rPr lang="en-US" sz="1400" b="1" dirty="0"/>
+              <a:t>Aggressive Fed Policy:</a:t>
+            </a:r>
+            <a:r>
+              <a:rPr lang="en-US" sz="1400" dirty="0"/>
+              <a:t> More hawkish-than-expected monetary policy from the Federal Reserve could exacerbate the negative sentiment for gold.</a:t>
+            </a:r>
+          </a:p>
+          <a:p>
+            <a:pPr lvl="1"/>
+            <a:r>
+              <a:rPr lang="en-US" sz="1400" b="1" dirty="0"/>
+              <a:t>Geopolitical Escalation:</a:t>
+            </a:r>
+            <a:r>
+              <a:rPr lang="en-US" sz="1400" dirty="0"/>
+              <a:t> While currently not supporting gold, a significant escalation in geopolitical tensions could potentially shift sentiment and drive demand for safe-haven assets, though this is not the current trend.</a:t>
+            </a:r>
+          </a:p>
+          <a:p>
+            <a:r>
+              <a:rPr lang="en-US" sz="1600" b="1" dirty="0"/>
+              <a:t>Short-Term Outlook:</a:t>
+            </a:r>
+            <a:r>
+              <a:rPr lang="en-US" sz="1600" dirty="0"/>
+              <a:t> The immediate outlook for gold appears challenging as long as the US Dollar remains strong and the Federal Reserve signals a hawkish stance. The combination of these factors is likely to continue weighing on gold prices. However, the exact trajectory will depend on evolving Fed policy expectations and any significant shifts in geopolitical events.</a:t>
+            </a:r>
+          </a:p>
+          <a:p>
+            <a:endParaRPr lang="en-US" sz="1600" dirty="0"/>
           </a:p>
         </p:txBody>
       </p:sp>
@@ -3667,7 +3801,7 @@
           <p:cNvPr id="4" name="Slide Number Placeholder 3">
             <a:extLst>
               <a:ext uri="{FF2B5EF4-FFF2-40B4-BE49-F238E27FC236}">
-                <a16:creationId xmlns:a16="http://schemas.microsoft.com/office/drawing/2014/main" id="{CD47E396-803A-C42B-AFC2-6B169C1901B9}"/>
+                <a16:creationId xmlns:a16="http://schemas.microsoft.com/office/drawing/2014/main" id="{67320E39-FB22-F951-C36C-46FA903517DF}"/>
               </a:ext>
             </a:extLst>
           </p:cNvPr>
@@ -3692,6 +3826,11 @@
         </p:txBody>
       </p:sp>
     </p:spTree>
+    <p:extLst>
+      <p:ext uri="{BB962C8B-B14F-4D97-AF65-F5344CB8AC3E}">
+        <p14:creationId xmlns:p14="http://schemas.microsoft.com/office/powerpoint/2010/main" val="3067208422"/>
+      </p:ext>
+    </p:extLst>
   </p:cSld>
   <p:clrMapOvr>
     <a:masterClrMapping/>
@@ -3726,14 +3865,27 @@
             <p:ph type="title"/>
           </p:nvPr>
         </p:nvSpPr>
-        <p:spPr/>
-        <p:txBody>
-          <a:bodyPr/>
+        <p:spPr>
+          <a:xfrm>
+            <a:off x="457200" y="274638"/>
+            <a:ext cx="8229600" cy="708001"/>
+          </a:xfrm>
+        </p:spPr>
+        <p:txBody>
+          <a:bodyPr>
+            <a:normAutofit fontScale="90000"/>
+          </a:bodyPr>
           <a:lstStyle/>
           <a:p>
             <a:r>
-              <a:t>Sample Prompt #2</a:t>
-            </a:r>
+              <a:rPr dirty="0"/>
+              <a:t>Sample Prompt #</a:t>
+            </a:r>
+            <a:r>
+              <a:rPr lang="en-US" dirty="0"/>
+              <a:t>2</a:t>
+            </a:r>
+            <a:endParaRPr dirty="0"/>
           </a:p>
         </p:txBody>
       </p:sp>
@@ -3747,18 +3899,118 @@
             <p:ph idx="1"/>
           </p:nvPr>
         </p:nvSpPr>
-        <p:spPr/>
-        <p:txBody>
-          <a:bodyPr/>
+        <p:spPr>
+          <a:xfrm>
+            <a:off x="457200" y="1166018"/>
+            <a:ext cx="8229600" cy="4934531"/>
+          </a:xfrm>
+        </p:spPr>
+        <p:txBody>
+          <a:bodyPr>
+            <a:normAutofit fontScale="92500"/>
+          </a:bodyPr>
           <a:lstStyle/>
           <a:p>
             <a:r>
-              <a:t>Q: What are the effects of geopolitical tensions on gold?</a:t>
-            </a:r>
-          </a:p>
-          <a:p>
-            <a:r>
-              <a:t>A: Tensions often increase demand for gold as a safe-haven asset.</a:t>
+              <a:rPr sz="1400" dirty="0"/>
+              <a:t>Q: What is the outlook for gold this week?</a:t>
+            </a:r>
+          </a:p>
+          <a:p>
+            <a:r>
+              <a:rPr sz="1400" dirty="0"/>
+              <a:t>A:</a:t>
+            </a:r>
+            <a:r>
+              <a:rPr lang="en-US" sz="1400" dirty="0"/>
+              <a:t> The gold market has experienced a significant downturn, with prices tumbling over 3% this week to their lowest level since November 2025. The current price of $4060.07 reflects a substantial weekly decline of 3.06%.</a:t>
+            </a:r>
+          </a:p>
+          <a:p>
+            <a:r>
+              <a:rPr lang="en-US" sz="1400" b="1" dirty="0"/>
+              <a:t>Key Drivers:</a:t>
+            </a:r>
+            <a:endParaRPr lang="en-US" sz="1400" dirty="0"/>
+          </a:p>
+          <a:p>
+            <a:r>
+              <a:rPr lang="en-US" sz="1400" b="1" dirty="0"/>
+              <a:t>Hawkish Fed Expectations:</a:t>
+            </a:r>
+            <a:r>
+              <a:rPr lang="en-US" sz="1400" dirty="0"/>
+              <a:t> Growing expectations that the Federal Reserve will maintain a hawkish stance, with traders increasingly betting on an interest-rate increase later this year, are pressuring gold. The probability of a Fed rate hike in September has significantly increased.</a:t>
+            </a:r>
+          </a:p>
+          <a:p>
+            <a:r>
+              <a:rPr lang="en-US" sz="1400" b="1" dirty="0"/>
+              <a:t>Stronger US Dollar:</a:t>
+            </a:r>
+            <a:r>
+              <a:rPr lang="en-US" sz="1400" dirty="0"/>
+              <a:t> A stronger US dollar is a primary headwind for gold, as the two assets often move inversely.</a:t>
+            </a:r>
+          </a:p>
+          <a:p>
+            <a:r>
+              <a:rPr lang="en-US" sz="1400" b="1" dirty="0"/>
+              <a:t>Geopolitical Uncertainty:</a:t>
+            </a:r>
+            <a:r>
+              <a:rPr lang="en-US" sz="1400" dirty="0"/>
+              <a:t> Despite heightened geopolitical uncertainty, gold has struggled to act as a traditional safe-haven asset, indicating a shift in market sentiment or other dominant factors.</a:t>
+            </a:r>
+          </a:p>
+          <a:p>
+            <a:r>
+              <a:rPr lang="en-US" sz="1400" b="1" dirty="0"/>
+              <a:t>Risks:</a:t>
+            </a:r>
+            <a:endParaRPr lang="en-US" sz="1400" dirty="0"/>
+          </a:p>
+          <a:p>
+            <a:r>
+              <a:rPr lang="en-US" sz="1400" b="1" dirty="0"/>
+              <a:t>Further Rate Hikes:</a:t>
+            </a:r>
+            <a:r>
+              <a:rPr lang="en-US" sz="1400" dirty="0"/>
+              <a:t> Continued hawkish rhetoric or actual rate hikes from the Fed would likely exert further downward pressure on gold prices.</a:t>
+            </a:r>
+          </a:p>
+          <a:p>
+            <a:r>
+              <a:rPr lang="en-US" sz="1400" b="1" dirty="0"/>
+              <a:t>Dollar Strength:</a:t>
+            </a:r>
+            <a:r>
+              <a:rPr lang="en-US" sz="1400" dirty="0"/>
+              <a:t> Sustained strength in the US dollar poses an ongoing risk to gold's valuation.</a:t>
+            </a:r>
+          </a:p>
+          <a:p>
+            <a:r>
+              <a:rPr lang="en-US" sz="1400" b="1" dirty="0"/>
+              <a:t>Diminished Safe-Haven Appeal:</a:t>
+            </a:r>
+            <a:r>
+              <a:rPr lang="en-US" sz="1400" dirty="0"/>
+              <a:t> The market's current disinterest in gold as a safe haven during geopolitical events suggests that this traditional driver may be less impactful in the short term.</a:t>
+            </a:r>
+          </a:p>
+          <a:p>
+            <a:r>
+              <a:rPr lang="en-US" sz="1400" b="1" dirty="0"/>
+              <a:t>Short-Term Outlook:</a:t>
+            </a:r>
+            <a:endParaRPr lang="en-US" sz="1400" dirty="0"/>
+          </a:p>
+          <a:p>
+            <a:r>
+              <a:rPr lang="en-US" sz="1400" dirty="0"/>
+              <a:t>The immediate outlook for gold appears challenging. The combination of increasing odds of Fed rate hikes and a strengthening US dollar suggests that downward pressure may persist. While geopolitical tensions could theoretically offer support, current market behavior indicates this is not a dominant factor. The market is closely watching inflation data and Fed commentary for any shifts in policy expectations. The current trend suggests a cautious sentiment for gold in the near term.</a:t>
             </a:r>
           </a:p>
         </p:txBody>
@@ -3768,7 +4020,7 @@
           <p:cNvPr id="4" name="Slide Number Placeholder 3">
             <a:extLst>
               <a:ext uri="{FF2B5EF4-FFF2-40B4-BE49-F238E27FC236}">
-                <a16:creationId xmlns:a16="http://schemas.microsoft.com/office/drawing/2014/main" id="{C110A815-0796-94B3-DA99-4E7D0B7182EF}"/>
+                <a16:creationId xmlns:a16="http://schemas.microsoft.com/office/drawing/2014/main" id="{CD47E396-803A-C42B-AFC2-6B169C1901B9}"/>
               </a:ext>
             </a:extLst>
           </p:cNvPr>
@@ -3827,14 +4079,27 @@
             <p:ph type="title"/>
           </p:nvPr>
         </p:nvSpPr>
-        <p:spPr/>
-        <p:txBody>
-          <a:bodyPr/>
+        <p:spPr>
+          <a:xfrm>
+            <a:off x="457200" y="90440"/>
+            <a:ext cx="8229600" cy="731837"/>
+          </a:xfrm>
+        </p:spPr>
+        <p:txBody>
+          <a:bodyPr>
+            <a:normAutofit fontScale="90000"/>
+          </a:bodyPr>
           <a:lstStyle/>
           <a:p>
             <a:r>
-              <a:t>Challenges &amp; Solutions</a:t>
-            </a:r>
+              <a:rPr dirty="0"/>
+              <a:t>Sample Prompt #</a:t>
+            </a:r>
+            <a:r>
+              <a:rPr lang="en-US" dirty="0"/>
+              <a:t>3</a:t>
+            </a:r>
+            <a:endParaRPr dirty="0"/>
           </a:p>
         </p:txBody>
       </p:sp>
@@ -3848,92 +4113,145 @@
             <p:ph idx="1"/>
           </p:nvPr>
         </p:nvSpPr>
-        <p:spPr/>
-        <p:txBody>
-          <a:bodyPr/>
+        <p:spPr>
+          <a:xfrm>
+            <a:off x="457200" y="972402"/>
+            <a:ext cx="8229600" cy="5383947"/>
+          </a:xfrm>
+        </p:spPr>
+        <p:txBody>
+          <a:bodyPr>
+            <a:normAutofit fontScale="92500"/>
+          </a:bodyPr>
           <a:lstStyle/>
           <a:p>
             <a:r>
-              <a:rPr dirty="0"/>
-              <a:t>API rate limits </a:t>
-            </a:r>
-            <a:r>
-              <a:rPr lang="en-US" dirty="0">
-                <a:solidFill>
-                  <a:srgbClr val="FF0000"/>
-                </a:solidFill>
-              </a:rPr>
-              <a:t>→</a:t>
-            </a:r>
-            <a:r>
-              <a:rPr dirty="0"/>
-              <a:t> Alpha Vantage</a:t>
-            </a:r>
-          </a:p>
-          <a:p>
-            <a:r>
-              <a:rPr dirty="0"/>
-              <a:t>Gemini quota limits </a:t>
-            </a:r>
-            <a:r>
-              <a:rPr lang="en-US" dirty="0">
-                <a:solidFill>
-                  <a:srgbClr val="FF0000"/>
-                </a:solidFill>
-              </a:rPr>
-              <a:t>→</a:t>
-            </a:r>
-            <a:r>
-              <a:rPr dirty="0"/>
-              <a:t> Retry/Fallback</a:t>
-            </a:r>
-          </a:p>
-          <a:p>
-            <a:r>
-              <a:rPr dirty="0"/>
-              <a:t>History persistence </a:t>
-            </a:r>
-            <a:r>
-              <a:rPr dirty="0">
-                <a:solidFill>
-                  <a:srgbClr val="FF0000"/>
-                </a:solidFill>
-              </a:rPr>
-              <a:t>→</a:t>
-            </a:r>
-            <a:r>
-              <a:rPr dirty="0"/>
-              <a:t> JSON storage</a:t>
-            </a:r>
-            <a:endParaRPr lang="en-US" dirty="0"/>
-          </a:p>
-          <a:p>
-            <a:r>
-              <a:rPr lang="en-US" dirty="0"/>
-              <a:t>Sanction Restrictions </a:t>
-            </a:r>
-            <a:r>
-              <a:rPr lang="en-US" dirty="0">
-                <a:solidFill>
-                  <a:srgbClr val="FF0000"/>
-                </a:solidFill>
-              </a:rPr>
-              <a:t>→ </a:t>
-            </a:r>
-            <a:r>
-              <a:rPr lang="en-US" dirty="0"/>
-              <a:t>VPN</a:t>
-            </a:r>
-            <a:endParaRPr dirty="0"/>
-          </a:p>
-        </p:txBody>
-      </p:sp>
-      <p:sp>
-        <p:nvSpPr>
-          <p:cNvPr id="5" name="Slide Number Placeholder 4">
+              <a:rPr sz="1200" dirty="0"/>
+              <a:t>Q: What are the effects of geopolitical tensions on gold?</a:t>
+            </a:r>
+          </a:p>
+          <a:p>
+            <a:r>
+              <a:rPr sz="1200" dirty="0"/>
+              <a:t>A: </a:t>
+            </a:r>
+            <a:r>
+              <a:rPr lang="en-US" sz="1200" b="1" dirty="0"/>
+              <a:t>Market Trend:</a:t>
+            </a:r>
+            <a:endParaRPr lang="en-US" sz="1200" dirty="0"/>
+          </a:p>
+          <a:p>
+            <a:r>
+              <a:rPr lang="en-US" sz="1200" dirty="0"/>
+              <a:t>The gold market is currently experiencing a downward trend, with prices tumbling over 3% in the past week to below $4,000 per ounce, reaching their lowest level since November 2025. The year-to-date performance shows a decline of approximately 5%, and the metal is nearly 20% below its January record high.</a:t>
+            </a:r>
+          </a:p>
+          <a:p>
+            <a:r>
+              <a:rPr lang="en-US" sz="1200" b="1" dirty="0"/>
+              <a:t>Key Drivers:</a:t>
+            </a:r>
+            <a:endParaRPr lang="en-US" sz="1200" dirty="0"/>
+          </a:p>
+          <a:p>
+            <a:r>
+              <a:rPr lang="en-US" sz="1200" b="1" dirty="0"/>
+              <a:t>Stronger US Dollar:</a:t>
+            </a:r>
+            <a:r>
+              <a:rPr lang="en-US" sz="1200" dirty="0"/>
+              <a:t> A strengthening US dollar is a significant headwind for gold, as it makes the precious metal more expensive for holders of other currencies.</a:t>
+            </a:r>
+          </a:p>
+          <a:p>
+            <a:r>
+              <a:rPr lang="en-US" sz="1200" b="1" dirty="0"/>
+              <a:t>Hawkish Federal Reserve Stance:</a:t>
+            </a:r>
+            <a:r>
+              <a:rPr lang="en-US" sz="1200" dirty="0"/>
+              <a:t> Growing expectations that the Federal Reserve will maintain a hawkish stance, with increased probability of an interest rate hike in September, are pressuring gold prices. Higher interest rates generally make non-yielding assets like gold less attractive.</a:t>
+            </a:r>
+          </a:p>
+          <a:p>
+            <a:r>
+              <a:rPr lang="en-US" sz="1200" b="1" dirty="0"/>
+              <a:t>Geopolitical Uncertainty (Limited Impact):</a:t>
+            </a:r>
+            <a:r>
+              <a:rPr lang="en-US" sz="1200" dirty="0"/>
+              <a:t> While geopolitical tensions, such as the conflict involving Iran, are present, gold has struggled to retain its traditional safe-haven appeal. This suggests that other factors are currently overriding its safe-haven status.</a:t>
+            </a:r>
+          </a:p>
+          <a:p>
+            <a:r>
+              <a:rPr lang="en-US" sz="1200" b="1" dirty="0"/>
+              <a:t>Inflation Concerns:</a:t>
+            </a:r>
+            <a:r>
+              <a:rPr lang="en-US" sz="1200" dirty="0"/>
+              <a:t> A surge in oil prices, potentially linked to geopolitical events, has fueled inflation concerns. Historically, gold can act as an inflation hedge, but this effect appears subdued in the current environment.</a:t>
+            </a:r>
+          </a:p>
+          <a:p>
+            <a:r>
+              <a:rPr lang="en-US" sz="1200" b="1" dirty="0"/>
+              <a:t>Risks:</a:t>
+            </a:r>
+            <a:endParaRPr lang="en-US" sz="1200" dirty="0"/>
+          </a:p>
+          <a:p>
+            <a:r>
+              <a:rPr lang="en-US" sz="1200" b="1" dirty="0"/>
+              <a:t>Further Fed Tightening:</a:t>
+            </a:r>
+            <a:r>
+              <a:rPr lang="en-US" sz="1200" dirty="0"/>
+              <a:t> Continued hawkish signals from the Federal Reserve could lead to further appreciation of the US dollar and higher interest rates, posing a risk to gold prices.</a:t>
+            </a:r>
+          </a:p>
+          <a:p>
+            <a:r>
+              <a:rPr lang="en-US" sz="1200" b="1" dirty="0"/>
+              <a:t>Escalation of Geopolitical Tensions:</a:t>
+            </a:r>
+            <a:r>
+              <a:rPr lang="en-US" sz="1200" dirty="0"/>
+              <a:t> While currently not a strong driver, a significant escalation of geopolitical conflicts could potentially revive gold's safe-haven demand, though this is uncertain given recent price action.</a:t>
+            </a:r>
+          </a:p>
+          <a:p>
+            <a:r>
+              <a:rPr lang="en-US" sz="1200" b="1" dirty="0"/>
+              <a:t>Economic Slowdown:</a:t>
+            </a:r>
+            <a:r>
+              <a:rPr lang="en-US" sz="1200" dirty="0"/>
+              <a:t> A broader global economic slowdown could also influence gold's trajectory, but the immediate focus appears to be on monetary policy and currency strength.</a:t>
+            </a:r>
+          </a:p>
+          <a:p>
+            <a:r>
+              <a:rPr lang="en-US" sz="1200" b="1" dirty="0"/>
+              <a:t>Short-Term Outlook:</a:t>
+            </a:r>
+            <a:endParaRPr lang="en-US" sz="1200" dirty="0"/>
+          </a:p>
+          <a:p>
+            <a:r>
+              <a:rPr lang="en-US" sz="1200" dirty="0"/>
+              <a:t>The short-term outlook for gold appears cautious. The prevailing headwinds of a strong US dollar and hawkish Fed expectations are likely to continue weighing on prices. The market is currently not fully pricing in the traditional safe-haven demand associated with geopolitical uncertainty. There is a notable divergence between heightened geopolitical tensions and gold's performance, indicating a complex interplay of market forces. The lack of a clear revival in gold's safe-haven appeal amidst current geopolitical events suggests that further price declines are a possibility if these dominant drivers persist.</a:t>
+            </a:r>
+          </a:p>
+        </p:txBody>
+      </p:sp>
+      <p:sp>
+        <p:nvSpPr>
+          <p:cNvPr id="4" name="Slide Number Placeholder 3">
             <a:extLst>
               <a:ext uri="{FF2B5EF4-FFF2-40B4-BE49-F238E27FC236}">
-                <a16:creationId xmlns:a16="http://schemas.microsoft.com/office/drawing/2014/main" id="{6EABDA5C-A6DE-69AF-DD47-44E6C4EF6305}"/>
+                <a16:creationId xmlns:a16="http://schemas.microsoft.com/office/drawing/2014/main" id="{C110A815-0796-94B3-DA99-4E7D0B7182EF}"/>
               </a:ext>
             </a:extLst>
           </p:cNvPr>
@@ -3984,7 +4302,13 @@
       </p:grpSpPr>
       <p:sp>
         <p:nvSpPr>
-          <p:cNvPr id="2" name="Title 1"/>
+          <p:cNvPr id="2" name="Title 1">
+            <a:extLst>
+              <a:ext uri="{FF2B5EF4-FFF2-40B4-BE49-F238E27FC236}">
+                <a16:creationId xmlns:a16="http://schemas.microsoft.com/office/drawing/2014/main" id="{F9BA1778-7E18-BF46-4173-B6AD3CC1E0F0}"/>
+              </a:ext>
+            </a:extLst>
+          </p:cNvPr>
           <p:cNvSpPr>
             <a:spLocks noGrp="1"/>
           </p:cNvSpPr>
@@ -3992,20 +4316,34 @@
             <p:ph type="title"/>
           </p:nvPr>
         </p:nvSpPr>
-        <p:spPr/>
-        <p:txBody>
-          <a:bodyPr/>
+        <p:spPr>
+          <a:xfrm>
+            <a:off x="457200" y="274638"/>
+            <a:ext cx="8229600" cy="667058"/>
+          </a:xfrm>
+        </p:spPr>
+        <p:txBody>
+          <a:bodyPr>
+            <a:normAutofit fontScale="90000"/>
+          </a:bodyPr>
           <a:lstStyle/>
           <a:p>
             <a:r>
-              <a:t>Future Improvements</a:t>
-            </a:r>
-          </a:p>
-        </p:txBody>
-      </p:sp>
-      <p:sp>
-        <p:nvSpPr>
-          <p:cNvPr id="3" name="Content Placeholder 2"/>
+              <a:rPr lang="en-US" dirty="0"/>
+              <a:t>Sample Prompt #4</a:t>
+            </a:r>
+          </a:p>
+        </p:txBody>
+      </p:sp>
+      <p:sp>
+        <p:nvSpPr>
+          <p:cNvPr id="3" name="Content Placeholder 2">
+            <a:extLst>
+              <a:ext uri="{FF2B5EF4-FFF2-40B4-BE49-F238E27FC236}">
+                <a16:creationId xmlns:a16="http://schemas.microsoft.com/office/drawing/2014/main" id="{FA13F889-FC60-599B-E70F-05417392B4A4}"/>
+              </a:ext>
+            </a:extLst>
+          </p:cNvPr>
           <p:cNvSpPr>
             <a:spLocks noGrp="1"/>
           </p:cNvSpPr>
@@ -4013,38 +4351,2911 @@
             <p:ph idx="1"/>
           </p:nvPr>
         </p:nvSpPr>
-        <p:spPr/>
-        <p:txBody>
-          <a:bodyPr/>
+        <p:spPr>
+          <a:xfrm>
+            <a:off x="457200" y="846162"/>
+            <a:ext cx="8229600" cy="5280002"/>
+          </a:xfrm>
+        </p:spPr>
+        <p:txBody>
+          <a:bodyPr>
+            <a:normAutofit fontScale="92500" lnSpcReduction="20000"/>
+          </a:bodyPr>
           <a:lstStyle/>
           <a:p>
-            <a:r>
-              <a:rPr dirty="0"/>
-              <a:t>Technical indicators</a:t>
-            </a:r>
-            <a:r>
-              <a:rPr lang="en-US" dirty="0"/>
-              <a:t> (MA, RSI, MACD, …)</a:t>
-            </a:r>
-            <a:endParaRPr dirty="0"/>
-          </a:p>
-          <a:p>
-            <a:r>
-              <a:rPr dirty="0"/>
-              <a:t>Sentiment analysis</a:t>
-            </a:r>
-          </a:p>
-          <a:p>
-            <a:r>
-              <a:rPr dirty="0"/>
-              <a:t>Multi-agent architecture</a:t>
-            </a:r>
-          </a:p>
-          <a:p>
-            <a:r>
-              <a:rPr dirty="0"/>
-              <a:t>Portfolio recommendations</a:t>
-            </a:r>
+            <a:pPr algn="r" rtl="1"/>
+            <a:r>
+              <a:rPr lang="en-US" sz="1800" dirty="0">
+                <a:cs typeface="B Nazanin" panose="00000400000000000000" pitchFamily="2" charset="-78"/>
+              </a:rPr>
+              <a:t>Q: آیا </a:t>
+            </a:r>
+            <a:r>
+              <a:rPr lang="en-US" sz="1800" dirty="0" err="1">
+                <a:cs typeface="B Nazanin" panose="00000400000000000000" pitchFamily="2" charset="-78"/>
+              </a:rPr>
+              <a:t>الان</a:t>
+            </a:r>
+            <a:r>
+              <a:rPr lang="en-US" sz="1800" dirty="0">
+                <a:cs typeface="B Nazanin" panose="00000400000000000000" pitchFamily="2" charset="-78"/>
+              </a:rPr>
+              <a:t> زمان مناسبی </a:t>
+            </a:r>
+            <a:r>
+              <a:rPr lang="en-US" sz="1800" dirty="0" err="1">
+                <a:cs typeface="B Nazanin" panose="00000400000000000000" pitchFamily="2" charset="-78"/>
+              </a:rPr>
+              <a:t>برای</a:t>
+            </a:r>
+            <a:r>
+              <a:rPr lang="en-US" sz="1800" dirty="0">
+                <a:cs typeface="B Nazanin" panose="00000400000000000000" pitchFamily="2" charset="-78"/>
+              </a:rPr>
+              <a:t> </a:t>
+            </a:r>
+            <a:r>
+              <a:rPr lang="en-US" sz="1800" dirty="0" err="1">
+                <a:cs typeface="B Nazanin" panose="00000400000000000000" pitchFamily="2" charset="-78"/>
+              </a:rPr>
+              <a:t>خرید</a:t>
+            </a:r>
+            <a:r>
+              <a:rPr lang="en-US" sz="1800" dirty="0">
+                <a:cs typeface="B Nazanin" panose="00000400000000000000" pitchFamily="2" charset="-78"/>
+              </a:rPr>
+              <a:t> </a:t>
+            </a:r>
+            <a:r>
+              <a:rPr lang="en-US" sz="1800" dirty="0" err="1">
+                <a:cs typeface="B Nazanin" panose="00000400000000000000" pitchFamily="2" charset="-78"/>
+              </a:rPr>
+              <a:t>طلا</a:t>
+            </a:r>
+            <a:r>
+              <a:rPr lang="en-US" sz="1800" dirty="0">
+                <a:cs typeface="B Nazanin" panose="00000400000000000000" pitchFamily="2" charset="-78"/>
+              </a:rPr>
+              <a:t> </a:t>
+            </a:r>
+            <a:r>
+              <a:rPr lang="en-US" sz="1800" dirty="0" err="1">
+                <a:cs typeface="B Nazanin" panose="00000400000000000000" pitchFamily="2" charset="-78"/>
+              </a:rPr>
+              <a:t>است</a:t>
+            </a:r>
+            <a:r>
+              <a:rPr lang="en-US" sz="1800" dirty="0">
+                <a:cs typeface="B Nazanin" panose="00000400000000000000" pitchFamily="2" charset="-78"/>
+              </a:rPr>
+              <a:t>؟</a:t>
+            </a:r>
+          </a:p>
+          <a:p>
+            <a:pPr algn="r" rtl="1"/>
+            <a:r>
+              <a:rPr lang="en-US" sz="1800" dirty="0">
+                <a:cs typeface="B Nazanin" panose="00000400000000000000" pitchFamily="2" charset="-78"/>
+              </a:rPr>
+              <a:t>A: </a:t>
+            </a:r>
+            <a:r>
+              <a:rPr lang="en-US" sz="1800" dirty="0" err="1">
+                <a:cs typeface="B Nazanin" panose="00000400000000000000" pitchFamily="2" charset="-78"/>
+              </a:rPr>
+              <a:t>در</a:t>
+            </a:r>
+            <a:r>
+              <a:rPr lang="en-US" sz="1800" dirty="0">
+                <a:cs typeface="B Nazanin" panose="00000400000000000000" pitchFamily="2" charset="-78"/>
+              </a:rPr>
+              <a:t> </a:t>
+            </a:r>
+            <a:r>
+              <a:rPr lang="en-US" sz="1800" dirty="0" err="1">
+                <a:cs typeface="B Nazanin" panose="00000400000000000000" pitchFamily="2" charset="-78"/>
+              </a:rPr>
+              <a:t>حال</a:t>
+            </a:r>
+            <a:r>
+              <a:rPr lang="en-US" sz="1800" dirty="0">
+                <a:cs typeface="B Nazanin" panose="00000400000000000000" pitchFamily="2" charset="-78"/>
+              </a:rPr>
+              <a:t> </a:t>
+            </a:r>
+            <a:r>
+              <a:rPr lang="en-US" sz="1800" dirty="0" err="1">
+                <a:cs typeface="B Nazanin" panose="00000400000000000000" pitchFamily="2" charset="-78"/>
+              </a:rPr>
+              <a:t>حاضر</a:t>
+            </a:r>
+            <a:r>
+              <a:rPr lang="en-US" sz="1800" dirty="0">
+                <a:cs typeface="B Nazanin" panose="00000400000000000000" pitchFamily="2" charset="-78"/>
+              </a:rPr>
+              <a:t>، </a:t>
+            </a:r>
+            <a:r>
+              <a:rPr lang="en-US" sz="1800" dirty="0" err="1">
+                <a:cs typeface="B Nazanin" panose="00000400000000000000" pitchFamily="2" charset="-78"/>
+              </a:rPr>
+              <a:t>بازار</a:t>
+            </a:r>
+            <a:r>
+              <a:rPr lang="en-US" sz="1800" dirty="0">
+                <a:cs typeface="B Nazanin" panose="00000400000000000000" pitchFamily="2" charset="-78"/>
+              </a:rPr>
+              <a:t> </a:t>
+            </a:r>
+            <a:r>
+              <a:rPr lang="en-US" sz="1800" dirty="0" err="1">
+                <a:cs typeface="B Nazanin" panose="00000400000000000000" pitchFamily="2" charset="-78"/>
+              </a:rPr>
+              <a:t>طلا</a:t>
+            </a:r>
+            <a:r>
+              <a:rPr lang="en-US" sz="1800" dirty="0">
+                <a:cs typeface="B Nazanin" panose="00000400000000000000" pitchFamily="2" charset="-78"/>
+              </a:rPr>
+              <a:t> </a:t>
+            </a:r>
+            <a:r>
+              <a:rPr lang="en-US" sz="1800" dirty="0" err="1">
+                <a:cs typeface="B Nazanin" panose="00000400000000000000" pitchFamily="2" charset="-78"/>
+              </a:rPr>
+              <a:t>با</a:t>
+            </a:r>
+            <a:r>
+              <a:rPr lang="en-US" sz="1800" dirty="0">
+                <a:cs typeface="B Nazanin" panose="00000400000000000000" pitchFamily="2" charset="-78"/>
+              </a:rPr>
+              <a:t> </a:t>
+            </a:r>
+            <a:r>
+              <a:rPr lang="en-US" sz="1800" dirty="0" err="1">
+                <a:cs typeface="B Nazanin" panose="00000400000000000000" pitchFamily="2" charset="-78"/>
+              </a:rPr>
+              <a:t>چالش‌هایی</a:t>
+            </a:r>
+            <a:r>
+              <a:rPr lang="en-US" sz="1800" dirty="0">
+                <a:cs typeface="B Nazanin" panose="00000400000000000000" pitchFamily="2" charset="-78"/>
+              </a:rPr>
+              <a:t> </a:t>
+            </a:r>
+            <a:r>
+              <a:rPr lang="en-US" sz="1800" dirty="0" err="1">
+                <a:cs typeface="B Nazanin" panose="00000400000000000000" pitchFamily="2" charset="-78"/>
+              </a:rPr>
+              <a:t>روبرو</a:t>
+            </a:r>
+            <a:r>
+              <a:rPr lang="en-US" sz="1800" dirty="0">
+                <a:cs typeface="B Nazanin" panose="00000400000000000000" pitchFamily="2" charset="-78"/>
+              </a:rPr>
+              <a:t> </a:t>
+            </a:r>
+            <a:r>
+              <a:rPr lang="en-US" sz="1800" dirty="0" err="1">
+                <a:cs typeface="B Nazanin" panose="00000400000000000000" pitchFamily="2" charset="-78"/>
+              </a:rPr>
+              <a:t>است</a:t>
+            </a:r>
+            <a:r>
+              <a:rPr lang="en-US" sz="1800" dirty="0">
+                <a:cs typeface="B Nazanin" panose="00000400000000000000" pitchFamily="2" charset="-78"/>
+              </a:rPr>
+              <a:t> </a:t>
+            </a:r>
+            <a:r>
+              <a:rPr lang="en-US" sz="1800" dirty="0" err="1">
+                <a:cs typeface="B Nazanin" panose="00000400000000000000" pitchFamily="2" charset="-78"/>
+              </a:rPr>
+              <a:t>که</a:t>
+            </a:r>
+            <a:r>
+              <a:rPr lang="en-US" sz="1800" dirty="0">
+                <a:cs typeface="B Nazanin" panose="00000400000000000000" pitchFamily="2" charset="-78"/>
+              </a:rPr>
+              <a:t> </a:t>
+            </a:r>
+            <a:r>
+              <a:rPr lang="en-US" sz="1800" dirty="0" err="1">
+                <a:cs typeface="B Nazanin" panose="00000400000000000000" pitchFamily="2" charset="-78"/>
+              </a:rPr>
+              <a:t>بر</a:t>
+            </a:r>
+            <a:r>
+              <a:rPr lang="en-US" sz="1800" dirty="0">
+                <a:cs typeface="B Nazanin" panose="00000400000000000000" pitchFamily="2" charset="-78"/>
+              </a:rPr>
+              <a:t> </a:t>
+            </a:r>
+            <a:r>
+              <a:rPr lang="en-US" sz="1800" dirty="0" err="1">
+                <a:cs typeface="B Nazanin" panose="00000400000000000000" pitchFamily="2" charset="-78"/>
+              </a:rPr>
+              <a:t>قیمت</a:t>
+            </a:r>
+            <a:r>
+              <a:rPr lang="en-US" sz="1800" dirty="0">
+                <a:cs typeface="B Nazanin" panose="00000400000000000000" pitchFamily="2" charset="-78"/>
+              </a:rPr>
+              <a:t> </a:t>
+            </a:r>
+            <a:r>
+              <a:rPr lang="en-US" sz="1800" dirty="0" err="1">
+                <a:cs typeface="B Nazanin" panose="00000400000000000000" pitchFamily="2" charset="-78"/>
+              </a:rPr>
+              <a:t>آن</a:t>
+            </a:r>
+            <a:r>
+              <a:rPr lang="en-US" sz="1800" dirty="0">
+                <a:cs typeface="B Nazanin" panose="00000400000000000000" pitchFamily="2" charset="-78"/>
+              </a:rPr>
+              <a:t> </a:t>
+            </a:r>
+            <a:r>
+              <a:rPr lang="en-US" sz="1800" dirty="0" err="1">
+                <a:cs typeface="B Nazanin" panose="00000400000000000000" pitchFamily="2" charset="-78"/>
+              </a:rPr>
+              <a:t>تأثیر</a:t>
+            </a:r>
+            <a:r>
+              <a:rPr lang="en-US" sz="1800" dirty="0">
+                <a:cs typeface="B Nazanin" panose="00000400000000000000" pitchFamily="2" charset="-78"/>
+              </a:rPr>
+              <a:t> </a:t>
+            </a:r>
+            <a:r>
+              <a:rPr lang="en-US" sz="1800" dirty="0" err="1">
+                <a:cs typeface="B Nazanin" panose="00000400000000000000" pitchFamily="2" charset="-78"/>
+              </a:rPr>
+              <a:t>گذاشته</a:t>
+            </a:r>
+            <a:r>
+              <a:rPr lang="en-US" sz="1800" dirty="0">
+                <a:cs typeface="B Nazanin" panose="00000400000000000000" pitchFamily="2" charset="-78"/>
+              </a:rPr>
+              <a:t> </a:t>
+            </a:r>
+            <a:r>
+              <a:rPr lang="en-US" sz="1800" dirty="0" err="1">
+                <a:cs typeface="B Nazanin" panose="00000400000000000000" pitchFamily="2" charset="-78"/>
+              </a:rPr>
+              <a:t>است</a:t>
+            </a:r>
+            <a:r>
+              <a:rPr lang="en-US" sz="1800" dirty="0">
+                <a:cs typeface="B Nazanin" panose="00000400000000000000" pitchFamily="2" charset="-78"/>
+              </a:rPr>
+              <a:t>.</a:t>
+            </a:r>
+          </a:p>
+          <a:p>
+            <a:pPr algn="r" rtl="1"/>
+            <a:r>
+              <a:rPr lang="en-US" sz="1800" b="1" dirty="0" err="1">
+                <a:cs typeface="B Nazanin" panose="00000400000000000000" pitchFamily="2" charset="-78"/>
+              </a:rPr>
+              <a:t>روند</a:t>
+            </a:r>
+            <a:r>
+              <a:rPr lang="en-US" sz="1800" b="1" dirty="0">
+                <a:cs typeface="B Nazanin" panose="00000400000000000000" pitchFamily="2" charset="-78"/>
+              </a:rPr>
+              <a:t> </a:t>
+            </a:r>
+            <a:r>
+              <a:rPr lang="en-US" sz="1800" b="1" dirty="0" err="1">
+                <a:cs typeface="B Nazanin" panose="00000400000000000000" pitchFamily="2" charset="-78"/>
+              </a:rPr>
+              <a:t>بازار</a:t>
+            </a:r>
+            <a:r>
+              <a:rPr lang="en-US" sz="1800" b="1" dirty="0">
+                <a:cs typeface="B Nazanin" panose="00000400000000000000" pitchFamily="2" charset="-78"/>
+              </a:rPr>
+              <a:t>:</a:t>
+            </a:r>
+            <a:endParaRPr lang="en-US" sz="1800" dirty="0">
+              <a:cs typeface="B Nazanin" panose="00000400000000000000" pitchFamily="2" charset="-78"/>
+            </a:endParaRPr>
+          </a:p>
+          <a:p>
+            <a:pPr algn="r" rtl="1"/>
+            <a:r>
+              <a:rPr lang="en-US" sz="1800" dirty="0" err="1">
+                <a:cs typeface="B Nazanin" panose="00000400000000000000" pitchFamily="2" charset="-78"/>
+              </a:rPr>
+              <a:t>قیمت</a:t>
+            </a:r>
+            <a:r>
+              <a:rPr lang="en-US" sz="1800" dirty="0">
+                <a:cs typeface="B Nazanin" panose="00000400000000000000" pitchFamily="2" charset="-78"/>
+              </a:rPr>
+              <a:t> </a:t>
+            </a:r>
+            <a:r>
+              <a:rPr lang="en-US" sz="1800" dirty="0" err="1">
+                <a:cs typeface="B Nazanin" panose="00000400000000000000" pitchFamily="2" charset="-78"/>
+              </a:rPr>
+              <a:t>طلا</a:t>
+            </a:r>
+            <a:r>
+              <a:rPr lang="en-US" sz="1800" dirty="0">
+                <a:cs typeface="B Nazanin" panose="00000400000000000000" pitchFamily="2" charset="-78"/>
+              </a:rPr>
+              <a:t> </a:t>
+            </a:r>
+            <a:r>
+              <a:rPr lang="en-US" sz="1800" dirty="0" err="1">
+                <a:cs typeface="B Nazanin" panose="00000400000000000000" pitchFamily="2" charset="-78"/>
+              </a:rPr>
+              <a:t>در</a:t>
+            </a:r>
+            <a:r>
+              <a:rPr lang="en-US" sz="1800" dirty="0">
+                <a:cs typeface="B Nazanin" panose="00000400000000000000" pitchFamily="2" charset="-78"/>
+              </a:rPr>
+              <a:t> </a:t>
+            </a:r>
+            <a:r>
+              <a:rPr lang="en-US" sz="1800" dirty="0" err="1">
+                <a:cs typeface="B Nazanin" panose="00000400000000000000" pitchFamily="2" charset="-78"/>
+              </a:rPr>
+              <a:t>هفته</a:t>
+            </a:r>
+            <a:r>
+              <a:rPr lang="en-US" sz="1800" dirty="0">
+                <a:cs typeface="B Nazanin" panose="00000400000000000000" pitchFamily="2" charset="-78"/>
+              </a:rPr>
+              <a:t> </a:t>
+            </a:r>
+            <a:r>
+              <a:rPr lang="en-US" sz="1800" dirty="0" err="1">
+                <a:cs typeface="B Nazanin" panose="00000400000000000000" pitchFamily="2" charset="-78"/>
+              </a:rPr>
+              <a:t>گذشته</a:t>
+            </a:r>
+            <a:r>
+              <a:rPr lang="en-US" sz="1800" dirty="0">
+                <a:cs typeface="B Nazanin" panose="00000400000000000000" pitchFamily="2" charset="-78"/>
+              </a:rPr>
+              <a:t> </a:t>
+            </a:r>
+            <a:r>
+              <a:rPr lang="en-US" sz="1800" dirty="0" err="1">
+                <a:cs typeface="B Nazanin" panose="00000400000000000000" pitchFamily="2" charset="-78"/>
+              </a:rPr>
+              <a:t>حدود</a:t>
+            </a:r>
+            <a:r>
+              <a:rPr lang="en-US" sz="1800" dirty="0">
+                <a:cs typeface="B Nazanin" panose="00000400000000000000" pitchFamily="2" charset="-78"/>
+              </a:rPr>
+              <a:t> ۳.۰۶ </a:t>
+            </a:r>
+            <a:r>
+              <a:rPr lang="en-US" sz="1800" dirty="0" err="1">
+                <a:cs typeface="B Nazanin" panose="00000400000000000000" pitchFamily="2" charset="-78"/>
+              </a:rPr>
+              <a:t>درصد</a:t>
+            </a:r>
+            <a:r>
+              <a:rPr lang="en-US" sz="1800" dirty="0">
+                <a:cs typeface="B Nazanin" panose="00000400000000000000" pitchFamily="2" charset="-78"/>
+              </a:rPr>
+              <a:t> </a:t>
+            </a:r>
+            <a:r>
+              <a:rPr lang="en-US" sz="1800" dirty="0" err="1">
+                <a:cs typeface="B Nazanin" panose="00000400000000000000" pitchFamily="2" charset="-78"/>
+              </a:rPr>
+              <a:t>کاهش</a:t>
+            </a:r>
+            <a:r>
+              <a:rPr lang="en-US" sz="1800" dirty="0">
+                <a:cs typeface="B Nazanin" panose="00000400000000000000" pitchFamily="2" charset="-78"/>
+              </a:rPr>
+              <a:t> </a:t>
+            </a:r>
+            <a:r>
+              <a:rPr lang="en-US" sz="1800" dirty="0" err="1">
+                <a:cs typeface="B Nazanin" panose="00000400000000000000" pitchFamily="2" charset="-78"/>
+              </a:rPr>
+              <a:t>یافته</a:t>
+            </a:r>
+            <a:r>
+              <a:rPr lang="en-US" sz="1800" dirty="0">
+                <a:cs typeface="B Nazanin" panose="00000400000000000000" pitchFamily="2" charset="-78"/>
+              </a:rPr>
+              <a:t> و </a:t>
+            </a:r>
+            <a:r>
+              <a:rPr lang="en-US" sz="1800" dirty="0" err="1">
+                <a:cs typeface="B Nazanin" panose="00000400000000000000" pitchFamily="2" charset="-78"/>
+              </a:rPr>
+              <a:t>به</a:t>
+            </a:r>
+            <a:r>
+              <a:rPr lang="en-US" sz="1800" dirty="0">
+                <a:cs typeface="B Nazanin" panose="00000400000000000000" pitchFamily="2" charset="-78"/>
+              </a:rPr>
+              <a:t> ۴۰۶۰.۰۷ </a:t>
+            </a:r>
+            <a:r>
+              <a:rPr lang="en-US" sz="1800" dirty="0" err="1">
+                <a:cs typeface="B Nazanin" panose="00000400000000000000" pitchFamily="2" charset="-78"/>
+              </a:rPr>
+              <a:t>واحد</a:t>
+            </a:r>
+            <a:r>
+              <a:rPr lang="en-US" sz="1800" dirty="0">
+                <a:cs typeface="B Nazanin" panose="00000400000000000000" pitchFamily="2" charset="-78"/>
+              </a:rPr>
+              <a:t> </a:t>
+            </a:r>
+            <a:r>
+              <a:rPr lang="en-US" sz="1800" dirty="0" err="1">
+                <a:cs typeface="B Nazanin" panose="00000400000000000000" pitchFamily="2" charset="-78"/>
+              </a:rPr>
+              <a:t>رسیده</a:t>
+            </a:r>
+            <a:r>
+              <a:rPr lang="en-US" sz="1800" dirty="0">
+                <a:cs typeface="B Nazanin" panose="00000400000000000000" pitchFamily="2" charset="-78"/>
+              </a:rPr>
+              <a:t> </a:t>
+            </a:r>
+            <a:r>
+              <a:rPr lang="en-US" sz="1800" dirty="0" err="1">
+                <a:cs typeface="B Nazanin" panose="00000400000000000000" pitchFamily="2" charset="-78"/>
+              </a:rPr>
+              <a:t>است</a:t>
+            </a:r>
+            <a:r>
+              <a:rPr lang="en-US" sz="1800" dirty="0">
+                <a:cs typeface="B Nazanin" panose="00000400000000000000" pitchFamily="2" charset="-78"/>
+              </a:rPr>
+              <a:t>.</a:t>
+            </a:r>
+          </a:p>
+          <a:p>
+            <a:pPr algn="r" rtl="1"/>
+            <a:r>
+              <a:rPr lang="en-US" sz="1800" dirty="0" err="1">
+                <a:cs typeface="B Nazanin" panose="00000400000000000000" pitchFamily="2" charset="-78"/>
+              </a:rPr>
+              <a:t>این</a:t>
+            </a:r>
+            <a:r>
+              <a:rPr lang="en-US" sz="1800" dirty="0">
+                <a:cs typeface="B Nazanin" panose="00000400000000000000" pitchFamily="2" charset="-78"/>
+              </a:rPr>
+              <a:t> </a:t>
+            </a:r>
+            <a:r>
+              <a:rPr lang="en-US" sz="1800" dirty="0" err="1">
+                <a:cs typeface="B Nazanin" panose="00000400000000000000" pitchFamily="2" charset="-78"/>
+              </a:rPr>
+              <a:t>کاهش</a:t>
+            </a:r>
+            <a:r>
+              <a:rPr lang="en-US" sz="1800" dirty="0">
+                <a:cs typeface="B Nazanin" panose="00000400000000000000" pitchFamily="2" charset="-78"/>
+              </a:rPr>
+              <a:t>، </a:t>
+            </a:r>
+            <a:r>
+              <a:rPr lang="en-US" sz="1800" dirty="0" err="1">
+                <a:cs typeface="B Nazanin" panose="00000400000000000000" pitchFamily="2" charset="-78"/>
+              </a:rPr>
+              <a:t>قیمت</a:t>
+            </a:r>
+            <a:r>
+              <a:rPr lang="en-US" sz="1800" dirty="0">
+                <a:cs typeface="B Nazanin" panose="00000400000000000000" pitchFamily="2" charset="-78"/>
+              </a:rPr>
+              <a:t> </a:t>
+            </a:r>
+            <a:r>
+              <a:rPr lang="en-US" sz="1800" dirty="0" err="1">
+                <a:cs typeface="B Nazanin" panose="00000400000000000000" pitchFamily="2" charset="-78"/>
+              </a:rPr>
+              <a:t>طلا</a:t>
+            </a:r>
+            <a:r>
+              <a:rPr lang="en-US" sz="1800" dirty="0">
+                <a:cs typeface="B Nazanin" panose="00000400000000000000" pitchFamily="2" charset="-78"/>
+              </a:rPr>
+              <a:t> </a:t>
+            </a:r>
+            <a:r>
+              <a:rPr lang="en-US" sz="1800" dirty="0" err="1">
+                <a:cs typeface="B Nazanin" panose="00000400000000000000" pitchFamily="2" charset="-78"/>
+              </a:rPr>
+              <a:t>را</a:t>
+            </a:r>
+            <a:r>
+              <a:rPr lang="en-US" sz="1800" dirty="0">
+                <a:cs typeface="B Nazanin" panose="00000400000000000000" pitchFamily="2" charset="-78"/>
+              </a:rPr>
+              <a:t> </a:t>
+            </a:r>
+            <a:r>
+              <a:rPr lang="en-US" sz="1800" dirty="0" err="1">
+                <a:cs typeface="B Nazanin" panose="00000400000000000000" pitchFamily="2" charset="-78"/>
+              </a:rPr>
+              <a:t>به</a:t>
+            </a:r>
+            <a:r>
+              <a:rPr lang="en-US" sz="1800" dirty="0">
+                <a:cs typeface="B Nazanin" panose="00000400000000000000" pitchFamily="2" charset="-78"/>
+              </a:rPr>
+              <a:t> </a:t>
+            </a:r>
+            <a:r>
+              <a:rPr lang="en-US" sz="1800" dirty="0" err="1">
+                <a:cs typeface="B Nazanin" panose="00000400000000000000" pitchFamily="2" charset="-78"/>
+              </a:rPr>
+              <a:t>پایین‌ترین</a:t>
+            </a:r>
+            <a:r>
+              <a:rPr lang="en-US" sz="1800" dirty="0">
+                <a:cs typeface="B Nazanin" panose="00000400000000000000" pitchFamily="2" charset="-78"/>
+              </a:rPr>
+              <a:t> </a:t>
+            </a:r>
+            <a:r>
+              <a:rPr lang="en-US" sz="1800" dirty="0" err="1">
+                <a:cs typeface="B Nazanin" panose="00000400000000000000" pitchFamily="2" charset="-78"/>
+              </a:rPr>
+              <a:t>سطح</a:t>
+            </a:r>
+            <a:r>
+              <a:rPr lang="en-US" sz="1800" dirty="0">
+                <a:cs typeface="B Nazanin" panose="00000400000000000000" pitchFamily="2" charset="-78"/>
+              </a:rPr>
+              <a:t> </a:t>
+            </a:r>
+            <a:r>
+              <a:rPr lang="en-US" sz="1800" dirty="0" err="1">
+                <a:cs typeface="B Nazanin" panose="00000400000000000000" pitchFamily="2" charset="-78"/>
+              </a:rPr>
+              <a:t>از</a:t>
+            </a:r>
+            <a:r>
+              <a:rPr lang="en-US" sz="1800" dirty="0">
+                <a:cs typeface="B Nazanin" panose="00000400000000000000" pitchFamily="2" charset="-78"/>
+              </a:rPr>
+              <a:t> </a:t>
+            </a:r>
+            <a:r>
+              <a:rPr lang="en-US" sz="1800" dirty="0" err="1">
+                <a:cs typeface="B Nazanin" panose="00000400000000000000" pitchFamily="2" charset="-78"/>
+              </a:rPr>
+              <a:t>نوامبر</a:t>
+            </a:r>
+            <a:r>
+              <a:rPr lang="en-US" sz="1800" dirty="0">
+                <a:cs typeface="B Nazanin" panose="00000400000000000000" pitchFamily="2" charset="-78"/>
+              </a:rPr>
+              <a:t> ۲۰۲۵ </a:t>
+            </a:r>
+            <a:r>
+              <a:rPr lang="en-US" sz="1800" dirty="0" err="1">
+                <a:cs typeface="B Nazanin" panose="00000400000000000000" pitchFamily="2" charset="-78"/>
+              </a:rPr>
+              <a:t>رسانده</a:t>
+            </a:r>
+            <a:r>
+              <a:rPr lang="en-US" sz="1800" dirty="0">
+                <a:cs typeface="B Nazanin" panose="00000400000000000000" pitchFamily="2" charset="-78"/>
+              </a:rPr>
+              <a:t> </a:t>
+            </a:r>
+            <a:r>
+              <a:rPr lang="en-US" sz="1800" dirty="0" err="1">
+                <a:cs typeface="B Nazanin" panose="00000400000000000000" pitchFamily="2" charset="-78"/>
+              </a:rPr>
+              <a:t>است</a:t>
+            </a:r>
+            <a:r>
+              <a:rPr lang="en-US" sz="1800" dirty="0">
+                <a:cs typeface="B Nazanin" panose="00000400000000000000" pitchFamily="2" charset="-78"/>
+              </a:rPr>
+              <a:t>.</a:t>
+            </a:r>
+          </a:p>
+          <a:p>
+            <a:pPr algn="r" rtl="1"/>
+            <a:r>
+              <a:rPr lang="en-US" sz="1800" b="1" dirty="0" err="1">
+                <a:cs typeface="B Nazanin" panose="00000400000000000000" pitchFamily="2" charset="-78"/>
+              </a:rPr>
+              <a:t>عوامل</a:t>
+            </a:r>
+            <a:r>
+              <a:rPr lang="en-US" sz="1800" b="1" dirty="0">
+                <a:cs typeface="B Nazanin" panose="00000400000000000000" pitchFamily="2" charset="-78"/>
+              </a:rPr>
+              <a:t> </a:t>
+            </a:r>
+            <a:r>
+              <a:rPr lang="en-US" sz="1800" b="1" dirty="0" err="1">
+                <a:cs typeface="B Nazanin" panose="00000400000000000000" pitchFamily="2" charset="-78"/>
+              </a:rPr>
+              <a:t>کلیدی</a:t>
+            </a:r>
+            <a:r>
+              <a:rPr lang="en-US" sz="1800" b="1" dirty="0">
+                <a:cs typeface="B Nazanin" panose="00000400000000000000" pitchFamily="2" charset="-78"/>
+              </a:rPr>
+              <a:t>:</a:t>
+            </a:r>
+            <a:endParaRPr lang="en-US" sz="1800" dirty="0">
+              <a:cs typeface="B Nazanin" panose="00000400000000000000" pitchFamily="2" charset="-78"/>
+            </a:endParaRPr>
+          </a:p>
+          <a:p>
+            <a:pPr algn="r" rtl="1"/>
+            <a:r>
+              <a:rPr lang="en-US" sz="1800" b="1" dirty="0" err="1">
+                <a:cs typeface="B Nazanin" panose="00000400000000000000" pitchFamily="2" charset="-78"/>
+              </a:rPr>
+              <a:t>تقویت</a:t>
+            </a:r>
+            <a:r>
+              <a:rPr lang="en-US" sz="1800" b="1" dirty="0">
+                <a:cs typeface="B Nazanin" panose="00000400000000000000" pitchFamily="2" charset="-78"/>
+              </a:rPr>
+              <a:t> </a:t>
+            </a:r>
+            <a:r>
+              <a:rPr lang="en-US" sz="1800" b="1" dirty="0" err="1">
+                <a:cs typeface="B Nazanin" panose="00000400000000000000" pitchFamily="2" charset="-78"/>
+              </a:rPr>
+              <a:t>دلار</a:t>
+            </a:r>
+            <a:r>
+              <a:rPr lang="en-US" sz="1800" b="1" dirty="0">
+                <a:cs typeface="B Nazanin" panose="00000400000000000000" pitchFamily="2" charset="-78"/>
+              </a:rPr>
+              <a:t> </a:t>
+            </a:r>
+            <a:r>
+              <a:rPr lang="en-US" sz="1800" b="1" dirty="0" err="1">
+                <a:cs typeface="B Nazanin" panose="00000400000000000000" pitchFamily="2" charset="-78"/>
+              </a:rPr>
+              <a:t>آمریکا</a:t>
+            </a:r>
+            <a:r>
+              <a:rPr lang="en-US" sz="1800" b="1" dirty="0">
+                <a:cs typeface="B Nazanin" panose="00000400000000000000" pitchFamily="2" charset="-78"/>
+              </a:rPr>
+              <a:t>:</a:t>
+            </a:r>
+            <a:r>
+              <a:rPr lang="en-US" sz="1800" dirty="0">
+                <a:cs typeface="B Nazanin" panose="00000400000000000000" pitchFamily="2" charset="-78"/>
+              </a:rPr>
+              <a:t> </a:t>
+            </a:r>
+            <a:r>
+              <a:rPr lang="en-US" sz="1800" dirty="0" err="1">
+                <a:cs typeface="B Nazanin" panose="00000400000000000000" pitchFamily="2" charset="-78"/>
+              </a:rPr>
+              <a:t>افزایش</a:t>
+            </a:r>
+            <a:r>
+              <a:rPr lang="en-US" sz="1800" dirty="0">
+                <a:cs typeface="B Nazanin" panose="00000400000000000000" pitchFamily="2" charset="-78"/>
+              </a:rPr>
+              <a:t> </a:t>
+            </a:r>
+            <a:r>
+              <a:rPr lang="en-US" sz="1800" dirty="0" err="1">
+                <a:cs typeface="B Nazanin" panose="00000400000000000000" pitchFamily="2" charset="-78"/>
+              </a:rPr>
+              <a:t>ارزش</a:t>
+            </a:r>
+            <a:r>
+              <a:rPr lang="en-US" sz="1800" dirty="0">
+                <a:cs typeface="B Nazanin" panose="00000400000000000000" pitchFamily="2" charset="-78"/>
+              </a:rPr>
+              <a:t> </a:t>
+            </a:r>
+            <a:r>
+              <a:rPr lang="en-US" sz="1800" dirty="0" err="1">
+                <a:cs typeface="B Nazanin" panose="00000400000000000000" pitchFamily="2" charset="-78"/>
+              </a:rPr>
+              <a:t>دلار</a:t>
+            </a:r>
+            <a:r>
+              <a:rPr lang="en-US" sz="1800" dirty="0">
+                <a:cs typeface="B Nazanin" panose="00000400000000000000" pitchFamily="2" charset="-78"/>
+              </a:rPr>
+              <a:t> </a:t>
+            </a:r>
+            <a:r>
+              <a:rPr lang="en-US" sz="1800" dirty="0" err="1">
+                <a:cs typeface="B Nazanin" panose="00000400000000000000" pitchFamily="2" charset="-78"/>
+              </a:rPr>
+              <a:t>آمریکا</a:t>
+            </a:r>
+            <a:r>
+              <a:rPr lang="en-US" sz="1800" dirty="0">
+                <a:cs typeface="B Nazanin" panose="00000400000000000000" pitchFamily="2" charset="-78"/>
+              </a:rPr>
+              <a:t> </a:t>
+            </a:r>
+            <a:r>
+              <a:rPr lang="en-US" sz="1800" dirty="0" err="1">
+                <a:cs typeface="B Nazanin" panose="00000400000000000000" pitchFamily="2" charset="-78"/>
+              </a:rPr>
+              <a:t>فشار</a:t>
+            </a:r>
+            <a:r>
+              <a:rPr lang="en-US" sz="1800" dirty="0">
+                <a:cs typeface="B Nazanin" panose="00000400000000000000" pitchFamily="2" charset="-78"/>
+              </a:rPr>
+              <a:t> </a:t>
+            </a:r>
+            <a:r>
+              <a:rPr lang="en-US" sz="1800" dirty="0" err="1">
+                <a:cs typeface="B Nazanin" panose="00000400000000000000" pitchFamily="2" charset="-78"/>
+              </a:rPr>
+              <a:t>نزولی</a:t>
+            </a:r>
+            <a:r>
+              <a:rPr lang="en-US" sz="1800" dirty="0">
+                <a:cs typeface="B Nazanin" panose="00000400000000000000" pitchFamily="2" charset="-78"/>
+              </a:rPr>
+              <a:t> </a:t>
+            </a:r>
+            <a:r>
+              <a:rPr lang="en-US" sz="1800" dirty="0" err="1">
+                <a:cs typeface="B Nazanin" panose="00000400000000000000" pitchFamily="2" charset="-78"/>
+              </a:rPr>
+              <a:t>بر</a:t>
+            </a:r>
+            <a:r>
+              <a:rPr lang="en-US" sz="1800" dirty="0">
+                <a:cs typeface="B Nazanin" panose="00000400000000000000" pitchFamily="2" charset="-78"/>
+              </a:rPr>
+              <a:t> </a:t>
+            </a:r>
+            <a:r>
+              <a:rPr lang="en-US" sz="1800" dirty="0" err="1">
+                <a:cs typeface="B Nazanin" panose="00000400000000000000" pitchFamily="2" charset="-78"/>
+              </a:rPr>
+              <a:t>قیمت</a:t>
+            </a:r>
+            <a:r>
+              <a:rPr lang="en-US" sz="1800" dirty="0">
+                <a:cs typeface="B Nazanin" panose="00000400000000000000" pitchFamily="2" charset="-78"/>
+              </a:rPr>
+              <a:t> </a:t>
+            </a:r>
+            <a:r>
+              <a:rPr lang="en-US" sz="1800" dirty="0" err="1">
+                <a:cs typeface="B Nazanin" panose="00000400000000000000" pitchFamily="2" charset="-78"/>
+              </a:rPr>
+              <a:t>طلا</a:t>
+            </a:r>
+            <a:r>
+              <a:rPr lang="en-US" sz="1800" dirty="0">
+                <a:cs typeface="B Nazanin" panose="00000400000000000000" pitchFamily="2" charset="-78"/>
+              </a:rPr>
+              <a:t> </a:t>
+            </a:r>
+            <a:r>
+              <a:rPr lang="en-US" sz="1800" dirty="0" err="1">
+                <a:cs typeface="B Nazanin" panose="00000400000000000000" pitchFamily="2" charset="-78"/>
+              </a:rPr>
+              <a:t>وارد</a:t>
+            </a:r>
+            <a:r>
+              <a:rPr lang="en-US" sz="1800" dirty="0">
+                <a:cs typeface="B Nazanin" panose="00000400000000000000" pitchFamily="2" charset="-78"/>
+              </a:rPr>
+              <a:t> </a:t>
+            </a:r>
+            <a:r>
+              <a:rPr lang="en-US" sz="1800" dirty="0" err="1">
+                <a:cs typeface="B Nazanin" panose="00000400000000000000" pitchFamily="2" charset="-78"/>
+              </a:rPr>
+              <a:t>می‌کند</a:t>
+            </a:r>
+            <a:r>
+              <a:rPr lang="en-US" sz="1800" dirty="0">
+                <a:cs typeface="B Nazanin" panose="00000400000000000000" pitchFamily="2" charset="-78"/>
+              </a:rPr>
+              <a:t>.</a:t>
+            </a:r>
+          </a:p>
+          <a:p>
+            <a:pPr algn="r" rtl="1"/>
+            <a:r>
+              <a:rPr lang="en-US" sz="1800" b="1" dirty="0" err="1">
+                <a:cs typeface="B Nazanin" panose="00000400000000000000" pitchFamily="2" charset="-78"/>
+              </a:rPr>
+              <a:t>انتظارات</a:t>
+            </a:r>
+            <a:r>
+              <a:rPr lang="en-US" sz="1800" b="1" dirty="0">
+                <a:cs typeface="B Nazanin" panose="00000400000000000000" pitchFamily="2" charset="-78"/>
+              </a:rPr>
+              <a:t> </a:t>
+            </a:r>
+            <a:r>
+              <a:rPr lang="en-US" sz="1800" b="1" dirty="0" err="1">
+                <a:cs typeface="B Nazanin" panose="00000400000000000000" pitchFamily="2" charset="-78"/>
+              </a:rPr>
+              <a:t>نرخ</a:t>
+            </a:r>
+            <a:r>
+              <a:rPr lang="en-US" sz="1800" b="1" dirty="0">
+                <a:cs typeface="B Nazanin" panose="00000400000000000000" pitchFamily="2" charset="-78"/>
+              </a:rPr>
+              <a:t> </a:t>
+            </a:r>
+            <a:r>
+              <a:rPr lang="en-US" sz="1800" b="1" dirty="0" err="1">
+                <a:cs typeface="B Nazanin" panose="00000400000000000000" pitchFamily="2" charset="-78"/>
+              </a:rPr>
+              <a:t>بهره</a:t>
+            </a:r>
+            <a:r>
+              <a:rPr lang="en-US" sz="1800" b="1" dirty="0">
+                <a:cs typeface="B Nazanin" panose="00000400000000000000" pitchFamily="2" charset="-78"/>
+              </a:rPr>
+              <a:t> فدرال </a:t>
+            </a:r>
+            <a:r>
+              <a:rPr lang="en-US" sz="1800" b="1" dirty="0" err="1">
+                <a:cs typeface="B Nazanin" panose="00000400000000000000" pitchFamily="2" charset="-78"/>
+              </a:rPr>
+              <a:t>رزرو</a:t>
+            </a:r>
+            <a:r>
+              <a:rPr lang="en-US" sz="1800" b="1" dirty="0">
+                <a:cs typeface="B Nazanin" panose="00000400000000000000" pitchFamily="2" charset="-78"/>
+              </a:rPr>
+              <a:t>:</a:t>
+            </a:r>
+            <a:r>
+              <a:rPr lang="en-US" sz="1800" dirty="0">
+                <a:cs typeface="B Nazanin" panose="00000400000000000000" pitchFamily="2" charset="-78"/>
+              </a:rPr>
+              <a:t> </a:t>
+            </a:r>
+            <a:r>
+              <a:rPr lang="en-US" sz="1800" dirty="0" err="1">
+                <a:cs typeface="B Nazanin" panose="00000400000000000000" pitchFamily="2" charset="-78"/>
+              </a:rPr>
+              <a:t>افزایش</a:t>
+            </a:r>
+            <a:r>
+              <a:rPr lang="en-US" sz="1800" dirty="0">
+                <a:cs typeface="B Nazanin" panose="00000400000000000000" pitchFamily="2" charset="-78"/>
+              </a:rPr>
+              <a:t> </a:t>
+            </a:r>
+            <a:r>
+              <a:rPr lang="en-US" sz="1800" dirty="0" err="1">
+                <a:cs typeface="B Nazanin" panose="00000400000000000000" pitchFamily="2" charset="-78"/>
+              </a:rPr>
+              <a:t>احتمالات</a:t>
+            </a:r>
+            <a:r>
+              <a:rPr lang="en-US" sz="1800" dirty="0">
+                <a:cs typeface="B Nazanin" panose="00000400000000000000" pitchFamily="2" charset="-78"/>
+              </a:rPr>
+              <a:t> </a:t>
+            </a:r>
+            <a:r>
+              <a:rPr lang="en-US" sz="1800" dirty="0" err="1">
+                <a:cs typeface="B Nazanin" panose="00000400000000000000" pitchFamily="2" charset="-78"/>
+              </a:rPr>
+              <a:t>مبنی</a:t>
+            </a:r>
+            <a:r>
+              <a:rPr lang="en-US" sz="1800" dirty="0">
+                <a:cs typeface="B Nazanin" panose="00000400000000000000" pitchFamily="2" charset="-78"/>
+              </a:rPr>
+              <a:t> </a:t>
+            </a:r>
+            <a:r>
+              <a:rPr lang="en-US" sz="1800" dirty="0" err="1">
+                <a:cs typeface="B Nazanin" panose="00000400000000000000" pitchFamily="2" charset="-78"/>
+              </a:rPr>
+              <a:t>بر</a:t>
+            </a:r>
+            <a:r>
+              <a:rPr lang="en-US" sz="1800" dirty="0">
+                <a:cs typeface="B Nazanin" panose="00000400000000000000" pitchFamily="2" charset="-78"/>
+              </a:rPr>
+              <a:t> </a:t>
+            </a:r>
+            <a:r>
+              <a:rPr lang="en-US" sz="1800" dirty="0" err="1">
+                <a:cs typeface="B Nazanin" panose="00000400000000000000" pitchFamily="2" charset="-78"/>
+              </a:rPr>
+              <a:t>افزایش</a:t>
+            </a:r>
+            <a:r>
+              <a:rPr lang="en-US" sz="1800" dirty="0">
+                <a:cs typeface="B Nazanin" panose="00000400000000000000" pitchFamily="2" charset="-78"/>
+              </a:rPr>
+              <a:t> </a:t>
+            </a:r>
+            <a:r>
+              <a:rPr lang="en-US" sz="1800" dirty="0" err="1">
+                <a:cs typeface="B Nazanin" panose="00000400000000000000" pitchFamily="2" charset="-78"/>
+              </a:rPr>
+              <a:t>نرخ</a:t>
+            </a:r>
+            <a:r>
+              <a:rPr lang="en-US" sz="1800" dirty="0">
+                <a:cs typeface="B Nazanin" panose="00000400000000000000" pitchFamily="2" charset="-78"/>
+              </a:rPr>
+              <a:t> </a:t>
+            </a:r>
+            <a:r>
+              <a:rPr lang="en-US" sz="1800" dirty="0" err="1">
+                <a:cs typeface="B Nazanin" panose="00000400000000000000" pitchFamily="2" charset="-78"/>
+              </a:rPr>
+              <a:t>بهره</a:t>
+            </a:r>
+            <a:r>
+              <a:rPr lang="en-US" sz="1800" dirty="0">
+                <a:cs typeface="B Nazanin" panose="00000400000000000000" pitchFamily="2" charset="-78"/>
+              </a:rPr>
+              <a:t> </a:t>
+            </a:r>
+            <a:r>
+              <a:rPr lang="en-US" sz="1800" dirty="0" err="1">
+                <a:cs typeface="B Nazanin" panose="00000400000000000000" pitchFamily="2" charset="-78"/>
+              </a:rPr>
+              <a:t>توسط</a:t>
+            </a:r>
+            <a:r>
+              <a:rPr lang="en-US" sz="1800" dirty="0">
+                <a:cs typeface="B Nazanin" panose="00000400000000000000" pitchFamily="2" charset="-78"/>
+              </a:rPr>
+              <a:t> فدرال </a:t>
+            </a:r>
+            <a:r>
+              <a:rPr lang="en-US" sz="1800" dirty="0" err="1">
+                <a:cs typeface="B Nazanin" panose="00000400000000000000" pitchFamily="2" charset="-78"/>
+              </a:rPr>
+              <a:t>رزرو</a:t>
+            </a:r>
+            <a:r>
+              <a:rPr lang="en-US" sz="1800" dirty="0">
+                <a:cs typeface="B Nazanin" panose="00000400000000000000" pitchFamily="2" charset="-78"/>
+              </a:rPr>
+              <a:t> </a:t>
+            </a:r>
+            <a:r>
+              <a:rPr lang="en-US" sz="1800" dirty="0" err="1">
+                <a:cs typeface="B Nazanin" panose="00000400000000000000" pitchFamily="2" charset="-78"/>
+              </a:rPr>
+              <a:t>در</a:t>
+            </a:r>
+            <a:r>
+              <a:rPr lang="en-US" sz="1800" dirty="0">
+                <a:cs typeface="B Nazanin" panose="00000400000000000000" pitchFamily="2" charset="-78"/>
+              </a:rPr>
+              <a:t> </a:t>
+            </a:r>
+            <a:r>
+              <a:rPr lang="en-US" sz="1800" dirty="0" err="1">
+                <a:cs typeface="B Nazanin" panose="00000400000000000000" pitchFamily="2" charset="-78"/>
+              </a:rPr>
+              <a:t>آینده</a:t>
+            </a:r>
+            <a:r>
+              <a:rPr lang="en-US" sz="1800" dirty="0">
+                <a:cs typeface="B Nazanin" panose="00000400000000000000" pitchFamily="2" charset="-78"/>
+              </a:rPr>
+              <a:t> </a:t>
+            </a:r>
+            <a:r>
+              <a:rPr lang="en-US" sz="1800" dirty="0" err="1">
+                <a:cs typeface="B Nazanin" panose="00000400000000000000" pitchFamily="2" charset="-78"/>
+              </a:rPr>
+              <a:t>نزدیک</a:t>
+            </a:r>
+            <a:r>
+              <a:rPr lang="en-US" sz="1800" dirty="0">
+                <a:cs typeface="B Nazanin" panose="00000400000000000000" pitchFamily="2" charset="-78"/>
+              </a:rPr>
+              <a:t>، </a:t>
+            </a:r>
+            <a:r>
+              <a:rPr lang="en-US" sz="1800" dirty="0" err="1">
+                <a:cs typeface="B Nazanin" panose="00000400000000000000" pitchFamily="2" charset="-78"/>
+              </a:rPr>
+              <a:t>جذابیت</a:t>
+            </a:r>
+            <a:r>
+              <a:rPr lang="en-US" sz="1800" dirty="0">
+                <a:cs typeface="B Nazanin" panose="00000400000000000000" pitchFamily="2" charset="-78"/>
+              </a:rPr>
+              <a:t> </a:t>
+            </a:r>
+            <a:r>
+              <a:rPr lang="en-US" sz="1800" dirty="0" err="1">
+                <a:cs typeface="B Nazanin" panose="00000400000000000000" pitchFamily="2" charset="-78"/>
+              </a:rPr>
+              <a:t>دارایی‌های</a:t>
+            </a:r>
+            <a:r>
+              <a:rPr lang="en-US" sz="1800" dirty="0">
+                <a:cs typeface="B Nazanin" panose="00000400000000000000" pitchFamily="2" charset="-78"/>
+              </a:rPr>
+              <a:t> </a:t>
+            </a:r>
+            <a:r>
+              <a:rPr lang="en-US" sz="1800" dirty="0" err="1">
+                <a:cs typeface="B Nazanin" panose="00000400000000000000" pitchFamily="2" charset="-78"/>
+              </a:rPr>
+              <a:t>با</a:t>
+            </a:r>
+            <a:r>
+              <a:rPr lang="en-US" sz="1800" dirty="0">
+                <a:cs typeface="B Nazanin" panose="00000400000000000000" pitchFamily="2" charset="-78"/>
+              </a:rPr>
+              <a:t> </a:t>
+            </a:r>
+            <a:r>
+              <a:rPr lang="en-US" sz="1800" dirty="0" err="1">
+                <a:cs typeface="B Nazanin" panose="00000400000000000000" pitchFamily="2" charset="-78"/>
+              </a:rPr>
+              <a:t>بازدهی</a:t>
+            </a:r>
+            <a:r>
+              <a:rPr lang="en-US" sz="1800" dirty="0">
+                <a:cs typeface="B Nazanin" panose="00000400000000000000" pitchFamily="2" charset="-78"/>
+              </a:rPr>
+              <a:t> </a:t>
+            </a:r>
+            <a:r>
+              <a:rPr lang="en-US" sz="1800" dirty="0" err="1">
+                <a:cs typeface="B Nazanin" panose="00000400000000000000" pitchFamily="2" charset="-78"/>
+              </a:rPr>
+              <a:t>ثابت</a:t>
+            </a:r>
+            <a:r>
+              <a:rPr lang="en-US" sz="1800" dirty="0">
+                <a:cs typeface="B Nazanin" panose="00000400000000000000" pitchFamily="2" charset="-78"/>
+              </a:rPr>
+              <a:t> </a:t>
+            </a:r>
+            <a:r>
+              <a:rPr lang="en-US" sz="1800" dirty="0" err="1">
+                <a:cs typeface="B Nazanin" panose="00000400000000000000" pitchFamily="2" charset="-78"/>
+              </a:rPr>
+              <a:t>مانند</a:t>
+            </a:r>
+            <a:r>
+              <a:rPr lang="en-US" sz="1800" dirty="0">
+                <a:cs typeface="B Nazanin" panose="00000400000000000000" pitchFamily="2" charset="-78"/>
+              </a:rPr>
+              <a:t> </a:t>
+            </a:r>
+            <a:r>
+              <a:rPr lang="en-US" sz="1800" dirty="0" err="1">
+                <a:cs typeface="B Nazanin" panose="00000400000000000000" pitchFamily="2" charset="-78"/>
+              </a:rPr>
+              <a:t>طلا</a:t>
+            </a:r>
+            <a:r>
+              <a:rPr lang="en-US" sz="1800" dirty="0">
+                <a:cs typeface="B Nazanin" panose="00000400000000000000" pitchFamily="2" charset="-78"/>
+              </a:rPr>
+              <a:t> </a:t>
+            </a:r>
+            <a:r>
+              <a:rPr lang="en-US" sz="1800" dirty="0" err="1">
+                <a:cs typeface="B Nazanin" panose="00000400000000000000" pitchFamily="2" charset="-78"/>
+              </a:rPr>
+              <a:t>را</a:t>
+            </a:r>
+            <a:r>
+              <a:rPr lang="en-US" sz="1800" dirty="0">
+                <a:cs typeface="B Nazanin" panose="00000400000000000000" pitchFamily="2" charset="-78"/>
+              </a:rPr>
+              <a:t> </a:t>
+            </a:r>
+            <a:r>
+              <a:rPr lang="en-US" sz="1800" dirty="0" err="1">
+                <a:cs typeface="B Nazanin" panose="00000400000000000000" pitchFamily="2" charset="-78"/>
+              </a:rPr>
+              <a:t>کاهش</a:t>
+            </a:r>
+            <a:r>
+              <a:rPr lang="en-US" sz="1800" dirty="0">
+                <a:cs typeface="B Nazanin" panose="00000400000000000000" pitchFamily="2" charset="-78"/>
+              </a:rPr>
+              <a:t> </a:t>
+            </a:r>
+            <a:r>
+              <a:rPr lang="en-US" sz="1800" dirty="0" err="1">
+                <a:cs typeface="B Nazanin" panose="00000400000000000000" pitchFamily="2" charset="-78"/>
+              </a:rPr>
+              <a:t>می‌دهد</a:t>
+            </a:r>
+            <a:r>
+              <a:rPr lang="en-US" sz="1800" dirty="0">
+                <a:cs typeface="B Nazanin" panose="00000400000000000000" pitchFamily="2" charset="-78"/>
+              </a:rPr>
+              <a:t>. </a:t>
+            </a:r>
+            <a:r>
+              <a:rPr lang="en-US" sz="1800" dirty="0" err="1">
+                <a:cs typeface="B Nazanin" panose="00000400000000000000" pitchFamily="2" charset="-78"/>
+              </a:rPr>
+              <a:t>اخبار</a:t>
+            </a:r>
+            <a:r>
+              <a:rPr lang="en-US" sz="1800" dirty="0">
+                <a:cs typeface="B Nazanin" panose="00000400000000000000" pitchFamily="2" charset="-78"/>
+              </a:rPr>
+              <a:t> </a:t>
+            </a:r>
+            <a:r>
+              <a:rPr lang="en-US" sz="1800" dirty="0" err="1">
+                <a:cs typeface="B Nazanin" panose="00000400000000000000" pitchFamily="2" charset="-78"/>
+              </a:rPr>
+              <a:t>نشان</a:t>
+            </a:r>
+            <a:r>
+              <a:rPr lang="en-US" sz="1800" dirty="0">
+                <a:cs typeface="B Nazanin" panose="00000400000000000000" pitchFamily="2" charset="-78"/>
+              </a:rPr>
+              <a:t> </a:t>
+            </a:r>
+            <a:r>
+              <a:rPr lang="en-US" sz="1800" dirty="0" err="1">
+                <a:cs typeface="B Nazanin" panose="00000400000000000000" pitchFamily="2" charset="-78"/>
+              </a:rPr>
+              <a:t>می‌دهد</a:t>
+            </a:r>
+            <a:r>
+              <a:rPr lang="en-US" sz="1800" dirty="0">
+                <a:cs typeface="B Nazanin" panose="00000400000000000000" pitchFamily="2" charset="-78"/>
+              </a:rPr>
+              <a:t> </a:t>
+            </a:r>
+            <a:r>
+              <a:rPr lang="en-US" sz="1800" dirty="0" err="1">
+                <a:cs typeface="B Nazanin" panose="00000400000000000000" pitchFamily="2" charset="-78"/>
+              </a:rPr>
+              <a:t>که</a:t>
+            </a:r>
+            <a:r>
+              <a:rPr lang="en-US" sz="1800" dirty="0">
+                <a:cs typeface="B Nazanin" panose="00000400000000000000" pitchFamily="2" charset="-78"/>
+              </a:rPr>
+              <a:t> </a:t>
+            </a:r>
+            <a:r>
+              <a:rPr lang="en-US" sz="1800" dirty="0" err="1">
+                <a:cs typeface="B Nazanin" panose="00000400000000000000" pitchFamily="2" charset="-78"/>
+              </a:rPr>
+              <a:t>احتمال</a:t>
+            </a:r>
+            <a:r>
+              <a:rPr lang="en-US" sz="1800" dirty="0">
+                <a:cs typeface="B Nazanin" panose="00000400000000000000" pitchFamily="2" charset="-78"/>
+              </a:rPr>
+              <a:t> </a:t>
+            </a:r>
+            <a:r>
+              <a:rPr lang="en-US" sz="1800" dirty="0" err="1">
+                <a:cs typeface="B Nazanin" panose="00000400000000000000" pitchFamily="2" charset="-78"/>
+              </a:rPr>
+              <a:t>افزایش</a:t>
+            </a:r>
+            <a:r>
+              <a:rPr lang="en-US" sz="1800" dirty="0">
+                <a:cs typeface="B Nazanin" panose="00000400000000000000" pitchFamily="2" charset="-78"/>
+              </a:rPr>
+              <a:t> </a:t>
+            </a:r>
+            <a:r>
+              <a:rPr lang="en-US" sz="1800" dirty="0" err="1">
+                <a:cs typeface="B Nazanin" panose="00000400000000000000" pitchFamily="2" charset="-78"/>
+              </a:rPr>
+              <a:t>نرخ</a:t>
+            </a:r>
+            <a:r>
+              <a:rPr lang="en-US" sz="1800" dirty="0">
+                <a:cs typeface="B Nazanin" panose="00000400000000000000" pitchFamily="2" charset="-78"/>
+              </a:rPr>
+              <a:t> </a:t>
+            </a:r>
+            <a:r>
+              <a:rPr lang="en-US" sz="1800" dirty="0" err="1">
+                <a:cs typeface="B Nazanin" panose="00000400000000000000" pitchFamily="2" charset="-78"/>
+              </a:rPr>
+              <a:t>بهره</a:t>
+            </a:r>
+            <a:r>
+              <a:rPr lang="en-US" sz="1800" dirty="0">
+                <a:cs typeface="B Nazanin" panose="00000400000000000000" pitchFamily="2" charset="-78"/>
+              </a:rPr>
+              <a:t> </a:t>
+            </a:r>
+            <a:r>
+              <a:rPr lang="en-US" sz="1800" dirty="0" err="1">
+                <a:cs typeface="B Nazanin" panose="00000400000000000000" pitchFamily="2" charset="-78"/>
+              </a:rPr>
+              <a:t>در</a:t>
+            </a:r>
+            <a:r>
+              <a:rPr lang="en-US" sz="1800" dirty="0">
+                <a:cs typeface="B Nazanin" panose="00000400000000000000" pitchFamily="2" charset="-78"/>
+              </a:rPr>
+              <a:t> </a:t>
+            </a:r>
+            <a:r>
+              <a:rPr lang="en-US" sz="1800" dirty="0" err="1">
+                <a:cs typeface="B Nazanin" panose="00000400000000000000" pitchFamily="2" charset="-78"/>
+              </a:rPr>
+              <a:t>سپتامبر</a:t>
+            </a:r>
+            <a:r>
+              <a:rPr lang="en-US" sz="1800" dirty="0">
+                <a:cs typeface="B Nazanin" panose="00000400000000000000" pitchFamily="2" charset="-78"/>
+              </a:rPr>
+              <a:t> </a:t>
+            </a:r>
+            <a:r>
+              <a:rPr lang="en-US" sz="1800" dirty="0" err="1">
+                <a:cs typeface="B Nazanin" panose="00000400000000000000" pitchFamily="2" charset="-78"/>
+              </a:rPr>
+              <a:t>از</a:t>
+            </a:r>
+            <a:r>
+              <a:rPr lang="en-US" sz="1800" dirty="0">
+                <a:cs typeface="B Nazanin" panose="00000400000000000000" pitchFamily="2" charset="-78"/>
+              </a:rPr>
+              <a:t> ۲۹٪ </a:t>
+            </a:r>
+            <a:r>
+              <a:rPr lang="en-US" sz="1800" dirty="0" err="1">
+                <a:cs typeface="B Nazanin" panose="00000400000000000000" pitchFamily="2" charset="-78"/>
+              </a:rPr>
+              <a:t>به</a:t>
+            </a:r>
+            <a:r>
+              <a:rPr lang="en-US" sz="1800" dirty="0">
+                <a:cs typeface="B Nazanin" panose="00000400000000000000" pitchFamily="2" charset="-78"/>
+              </a:rPr>
+              <a:t> </a:t>
+            </a:r>
+            <a:r>
+              <a:rPr lang="en-US" sz="1800" dirty="0" err="1">
+                <a:cs typeface="B Nazanin" panose="00000400000000000000" pitchFamily="2" charset="-78"/>
+              </a:rPr>
+              <a:t>حدود</a:t>
+            </a:r>
+            <a:r>
+              <a:rPr lang="en-US" sz="1800" dirty="0">
+                <a:cs typeface="B Nazanin" panose="00000400000000000000" pitchFamily="2" charset="-78"/>
+              </a:rPr>
+              <a:t> ۶۸٪ </a:t>
+            </a:r>
+            <a:r>
+              <a:rPr lang="en-US" sz="1800" dirty="0" err="1">
+                <a:cs typeface="B Nazanin" panose="00000400000000000000" pitchFamily="2" charset="-78"/>
+              </a:rPr>
+              <a:t>افزایش</a:t>
+            </a:r>
+            <a:r>
+              <a:rPr lang="en-US" sz="1800" dirty="0">
+                <a:cs typeface="B Nazanin" panose="00000400000000000000" pitchFamily="2" charset="-78"/>
+              </a:rPr>
+              <a:t> </a:t>
+            </a:r>
+            <a:r>
+              <a:rPr lang="en-US" sz="1800" dirty="0" err="1">
+                <a:cs typeface="B Nazanin" panose="00000400000000000000" pitchFamily="2" charset="-78"/>
+              </a:rPr>
+              <a:t>یافته</a:t>
+            </a:r>
+            <a:r>
+              <a:rPr lang="en-US" sz="1800" dirty="0">
+                <a:cs typeface="B Nazanin" panose="00000400000000000000" pitchFamily="2" charset="-78"/>
+              </a:rPr>
+              <a:t> </a:t>
+            </a:r>
+            <a:r>
+              <a:rPr lang="en-US" sz="1800" dirty="0" err="1">
+                <a:cs typeface="B Nazanin" panose="00000400000000000000" pitchFamily="2" charset="-78"/>
+              </a:rPr>
+              <a:t>است</a:t>
+            </a:r>
+            <a:r>
+              <a:rPr lang="en-US" sz="1800" dirty="0">
+                <a:cs typeface="B Nazanin" panose="00000400000000000000" pitchFamily="2" charset="-78"/>
+              </a:rPr>
+              <a:t>.</a:t>
+            </a:r>
+          </a:p>
+          <a:p>
+            <a:pPr algn="r" rtl="1"/>
+            <a:r>
+              <a:rPr lang="en-US" sz="1800" b="1" dirty="0" err="1">
+                <a:cs typeface="B Nazanin" panose="00000400000000000000" pitchFamily="2" charset="-78"/>
+              </a:rPr>
+              <a:t>عدم</a:t>
+            </a:r>
+            <a:r>
+              <a:rPr lang="en-US" sz="1800" b="1" dirty="0">
+                <a:cs typeface="B Nazanin" panose="00000400000000000000" pitchFamily="2" charset="-78"/>
+              </a:rPr>
+              <a:t> </a:t>
+            </a:r>
+            <a:r>
+              <a:rPr lang="en-US" sz="1800" b="1" dirty="0" err="1">
+                <a:cs typeface="B Nazanin" panose="00000400000000000000" pitchFamily="2" charset="-78"/>
+              </a:rPr>
+              <a:t>اطمینان</a:t>
+            </a:r>
+            <a:r>
+              <a:rPr lang="en-US" sz="1800" b="1" dirty="0">
+                <a:cs typeface="B Nazanin" panose="00000400000000000000" pitchFamily="2" charset="-78"/>
+              </a:rPr>
+              <a:t> </a:t>
+            </a:r>
+            <a:r>
+              <a:rPr lang="en-US" sz="1800" b="1" dirty="0" err="1">
+                <a:cs typeface="B Nazanin" panose="00000400000000000000" pitchFamily="2" charset="-78"/>
+              </a:rPr>
+              <a:t>ژئوپلیتیکی</a:t>
+            </a:r>
+            <a:r>
+              <a:rPr lang="en-US" sz="1800" b="1" dirty="0">
+                <a:cs typeface="B Nazanin" panose="00000400000000000000" pitchFamily="2" charset="-78"/>
+              </a:rPr>
+              <a:t>:</a:t>
+            </a:r>
+            <a:r>
+              <a:rPr lang="en-US" sz="1800" dirty="0">
+                <a:cs typeface="B Nazanin" panose="00000400000000000000" pitchFamily="2" charset="-78"/>
+              </a:rPr>
+              <a:t> </a:t>
+            </a:r>
+            <a:r>
+              <a:rPr lang="en-US" sz="1800" dirty="0" err="1">
+                <a:cs typeface="B Nazanin" panose="00000400000000000000" pitchFamily="2" charset="-78"/>
+              </a:rPr>
+              <a:t>با</a:t>
+            </a:r>
+            <a:r>
+              <a:rPr lang="en-US" sz="1800" dirty="0">
+                <a:cs typeface="B Nazanin" panose="00000400000000000000" pitchFamily="2" charset="-78"/>
+              </a:rPr>
+              <a:t> </a:t>
+            </a:r>
+            <a:r>
+              <a:rPr lang="en-US" sz="1800" dirty="0" err="1">
+                <a:cs typeface="B Nazanin" panose="00000400000000000000" pitchFamily="2" charset="-78"/>
+              </a:rPr>
+              <a:t>وجود</a:t>
+            </a:r>
+            <a:r>
+              <a:rPr lang="en-US" sz="1800" dirty="0">
+                <a:cs typeface="B Nazanin" panose="00000400000000000000" pitchFamily="2" charset="-78"/>
+              </a:rPr>
+              <a:t> </a:t>
+            </a:r>
+            <a:r>
+              <a:rPr lang="en-US" sz="1800" dirty="0" err="1">
+                <a:cs typeface="B Nazanin" panose="00000400000000000000" pitchFamily="2" charset="-78"/>
+              </a:rPr>
+              <a:t>تنش‌های</a:t>
+            </a:r>
+            <a:r>
+              <a:rPr lang="en-US" sz="1800" dirty="0">
+                <a:cs typeface="B Nazanin" panose="00000400000000000000" pitchFamily="2" charset="-78"/>
+              </a:rPr>
+              <a:t> </a:t>
+            </a:r>
+            <a:r>
+              <a:rPr lang="en-US" sz="1800" dirty="0" err="1">
+                <a:cs typeface="B Nazanin" panose="00000400000000000000" pitchFamily="2" charset="-78"/>
+              </a:rPr>
+              <a:t>ژئوپلیتیکی</a:t>
+            </a:r>
+            <a:r>
+              <a:rPr lang="en-US" sz="1800" dirty="0">
+                <a:cs typeface="B Nazanin" panose="00000400000000000000" pitchFamily="2" charset="-78"/>
+              </a:rPr>
+              <a:t>، </a:t>
+            </a:r>
+            <a:r>
+              <a:rPr lang="en-US" sz="1800" dirty="0" err="1">
+                <a:cs typeface="B Nazanin" panose="00000400000000000000" pitchFamily="2" charset="-78"/>
+              </a:rPr>
+              <a:t>طلا</a:t>
+            </a:r>
+            <a:r>
+              <a:rPr lang="en-US" sz="1800" dirty="0">
+                <a:cs typeface="B Nazanin" panose="00000400000000000000" pitchFamily="2" charset="-78"/>
+              </a:rPr>
+              <a:t> </a:t>
+            </a:r>
+            <a:r>
+              <a:rPr lang="en-US" sz="1800" dirty="0" err="1">
+                <a:cs typeface="B Nazanin" panose="00000400000000000000" pitchFamily="2" charset="-78"/>
+              </a:rPr>
+              <a:t>نتوانسته</a:t>
+            </a:r>
+            <a:r>
+              <a:rPr lang="en-US" sz="1800" dirty="0">
+                <a:cs typeface="B Nazanin" panose="00000400000000000000" pitchFamily="2" charset="-78"/>
+              </a:rPr>
+              <a:t> </a:t>
+            </a:r>
+            <a:r>
+              <a:rPr lang="en-US" sz="1800" dirty="0" err="1">
+                <a:cs typeface="B Nazanin" panose="00000400000000000000" pitchFamily="2" charset="-78"/>
+              </a:rPr>
+              <a:t>است</a:t>
+            </a:r>
+            <a:r>
+              <a:rPr lang="en-US" sz="1800" dirty="0">
+                <a:cs typeface="B Nazanin" panose="00000400000000000000" pitchFamily="2" charset="-78"/>
+              </a:rPr>
+              <a:t> </a:t>
+            </a:r>
+            <a:r>
+              <a:rPr lang="en-US" sz="1800" dirty="0" err="1">
+                <a:cs typeface="B Nazanin" panose="00000400000000000000" pitchFamily="2" charset="-78"/>
+              </a:rPr>
+              <a:t>نقش</a:t>
+            </a:r>
+            <a:r>
+              <a:rPr lang="en-US" sz="1800" dirty="0">
+                <a:cs typeface="B Nazanin" panose="00000400000000000000" pitchFamily="2" charset="-78"/>
+              </a:rPr>
+              <a:t> </a:t>
+            </a:r>
+            <a:r>
+              <a:rPr lang="en-US" sz="1800" dirty="0" err="1">
+                <a:cs typeface="B Nazanin" panose="00000400000000000000" pitchFamily="2" charset="-78"/>
+              </a:rPr>
+              <a:t>سنتی</a:t>
+            </a:r>
+            <a:r>
+              <a:rPr lang="en-US" sz="1800" dirty="0">
+                <a:cs typeface="B Nazanin" panose="00000400000000000000" pitchFamily="2" charset="-78"/>
+              </a:rPr>
+              <a:t> </a:t>
+            </a:r>
+            <a:r>
+              <a:rPr lang="en-US" sz="1800" dirty="0" err="1">
+                <a:cs typeface="B Nazanin" panose="00000400000000000000" pitchFamily="2" charset="-78"/>
+              </a:rPr>
+              <a:t>خود</a:t>
+            </a:r>
+            <a:r>
+              <a:rPr lang="en-US" sz="1800" dirty="0">
+                <a:cs typeface="B Nazanin" panose="00000400000000000000" pitchFamily="2" charset="-78"/>
+              </a:rPr>
+              <a:t> </a:t>
+            </a:r>
+            <a:r>
+              <a:rPr lang="en-US" sz="1800" dirty="0" err="1">
+                <a:cs typeface="B Nazanin" panose="00000400000000000000" pitchFamily="2" charset="-78"/>
+              </a:rPr>
+              <a:t>را</a:t>
+            </a:r>
+            <a:r>
+              <a:rPr lang="en-US" sz="1800" dirty="0">
+                <a:cs typeface="B Nazanin" panose="00000400000000000000" pitchFamily="2" charset="-78"/>
+              </a:rPr>
+              <a:t> </a:t>
+            </a:r>
+            <a:r>
+              <a:rPr lang="en-US" sz="1800" dirty="0" err="1">
+                <a:cs typeface="B Nazanin" panose="00000400000000000000" pitchFamily="2" charset="-78"/>
+              </a:rPr>
+              <a:t>به</a:t>
+            </a:r>
+            <a:r>
+              <a:rPr lang="en-US" sz="1800" dirty="0">
+                <a:cs typeface="B Nazanin" panose="00000400000000000000" pitchFamily="2" charset="-78"/>
+              </a:rPr>
+              <a:t> </a:t>
+            </a:r>
+            <a:r>
+              <a:rPr lang="en-US" sz="1800" dirty="0" err="1">
+                <a:cs typeface="B Nazanin" panose="00000400000000000000" pitchFamily="2" charset="-78"/>
+              </a:rPr>
+              <a:t>عنوان</a:t>
+            </a:r>
+            <a:r>
+              <a:rPr lang="en-US" sz="1800" dirty="0">
+                <a:cs typeface="B Nazanin" panose="00000400000000000000" pitchFamily="2" charset="-78"/>
+              </a:rPr>
+              <a:t> </a:t>
+            </a:r>
+            <a:r>
+              <a:rPr lang="en-US" sz="1800" dirty="0" err="1">
+                <a:cs typeface="B Nazanin" panose="00000400000000000000" pitchFamily="2" charset="-78"/>
+              </a:rPr>
+              <a:t>یک</a:t>
+            </a:r>
+            <a:r>
+              <a:rPr lang="en-US" sz="1800" dirty="0">
+                <a:cs typeface="B Nazanin" panose="00000400000000000000" pitchFamily="2" charset="-78"/>
+              </a:rPr>
+              <a:t> </a:t>
+            </a:r>
+            <a:r>
+              <a:rPr lang="en-US" sz="1800" dirty="0" err="1">
+                <a:cs typeface="B Nazanin" panose="00000400000000000000" pitchFamily="2" charset="-78"/>
+              </a:rPr>
+              <a:t>دارایی</a:t>
+            </a:r>
+            <a:r>
+              <a:rPr lang="en-US" sz="1800" dirty="0">
+                <a:cs typeface="B Nazanin" panose="00000400000000000000" pitchFamily="2" charset="-78"/>
+              </a:rPr>
+              <a:t> </a:t>
+            </a:r>
+            <a:r>
+              <a:rPr lang="en-US" sz="1800" dirty="0" err="1">
+                <a:cs typeface="B Nazanin" panose="00000400000000000000" pitchFamily="2" charset="-78"/>
+              </a:rPr>
+              <a:t>امن</a:t>
+            </a:r>
+            <a:r>
+              <a:rPr lang="en-US" sz="1800" dirty="0">
+                <a:cs typeface="B Nazanin" panose="00000400000000000000" pitchFamily="2" charset="-78"/>
+              </a:rPr>
+              <a:t> </a:t>
+            </a:r>
+            <a:r>
+              <a:rPr lang="en-US" sz="1800" dirty="0" err="1">
+                <a:cs typeface="B Nazanin" panose="00000400000000000000" pitchFamily="2" charset="-78"/>
+              </a:rPr>
+              <a:t>به</a:t>
+            </a:r>
+            <a:r>
+              <a:rPr lang="en-US" sz="1800" dirty="0">
+                <a:cs typeface="B Nazanin" panose="00000400000000000000" pitchFamily="2" charset="-78"/>
+              </a:rPr>
+              <a:t> </a:t>
+            </a:r>
+            <a:r>
+              <a:rPr lang="en-US" sz="1800" dirty="0" err="1">
+                <a:cs typeface="B Nazanin" panose="00000400000000000000" pitchFamily="2" charset="-78"/>
+              </a:rPr>
+              <a:t>طور</a:t>
+            </a:r>
+            <a:r>
+              <a:rPr lang="en-US" sz="1800" dirty="0">
+                <a:cs typeface="B Nazanin" panose="00000400000000000000" pitchFamily="2" charset="-78"/>
+              </a:rPr>
+              <a:t> </a:t>
+            </a:r>
+            <a:r>
+              <a:rPr lang="en-US" sz="1800" dirty="0" err="1">
+                <a:cs typeface="B Nazanin" panose="00000400000000000000" pitchFamily="2" charset="-78"/>
+              </a:rPr>
+              <a:t>کامل</a:t>
+            </a:r>
+            <a:r>
+              <a:rPr lang="en-US" sz="1800" dirty="0">
+                <a:cs typeface="B Nazanin" panose="00000400000000000000" pitchFamily="2" charset="-78"/>
+              </a:rPr>
+              <a:t> </a:t>
+            </a:r>
+            <a:r>
+              <a:rPr lang="en-US" sz="1800" dirty="0" err="1">
+                <a:cs typeface="B Nazanin" panose="00000400000000000000" pitchFamily="2" charset="-78"/>
+              </a:rPr>
+              <a:t>ایفا</a:t>
+            </a:r>
+            <a:r>
+              <a:rPr lang="en-US" sz="1800" dirty="0">
+                <a:cs typeface="B Nazanin" panose="00000400000000000000" pitchFamily="2" charset="-78"/>
+              </a:rPr>
+              <a:t> </a:t>
+            </a:r>
+            <a:r>
+              <a:rPr lang="en-US" sz="1800" dirty="0" err="1">
+                <a:cs typeface="B Nazanin" panose="00000400000000000000" pitchFamily="2" charset="-78"/>
+              </a:rPr>
+              <a:t>کند</a:t>
+            </a:r>
+            <a:r>
+              <a:rPr lang="en-US" sz="1800" dirty="0">
+                <a:cs typeface="B Nazanin" panose="00000400000000000000" pitchFamily="2" charset="-78"/>
+              </a:rPr>
+              <a:t>.</a:t>
+            </a:r>
+          </a:p>
+          <a:p>
+            <a:pPr algn="r" rtl="1"/>
+            <a:r>
+              <a:rPr lang="en-US" sz="1800" b="1" dirty="0" err="1">
+                <a:cs typeface="B Nazanin" panose="00000400000000000000" pitchFamily="2" charset="-78"/>
+              </a:rPr>
+              <a:t>ریسک‌ها</a:t>
+            </a:r>
+            <a:r>
+              <a:rPr lang="en-US" sz="1800" b="1" dirty="0">
+                <a:cs typeface="B Nazanin" panose="00000400000000000000" pitchFamily="2" charset="-78"/>
+              </a:rPr>
+              <a:t>:</a:t>
+            </a:r>
+            <a:endParaRPr lang="en-US" sz="1800" dirty="0">
+              <a:cs typeface="B Nazanin" panose="00000400000000000000" pitchFamily="2" charset="-78"/>
+            </a:endParaRPr>
+          </a:p>
+          <a:p>
+            <a:pPr algn="r" rtl="1"/>
+            <a:r>
+              <a:rPr lang="en-US" sz="1800" b="1" dirty="0" err="1">
+                <a:cs typeface="B Nazanin" panose="00000400000000000000" pitchFamily="2" charset="-78"/>
+              </a:rPr>
+              <a:t>سیاست‌های</a:t>
+            </a:r>
+            <a:r>
+              <a:rPr lang="en-US" sz="1800" b="1" dirty="0">
+                <a:cs typeface="B Nazanin" panose="00000400000000000000" pitchFamily="2" charset="-78"/>
+              </a:rPr>
+              <a:t> </a:t>
+            </a:r>
+            <a:r>
+              <a:rPr lang="en-US" sz="1800" b="1" dirty="0" err="1">
+                <a:cs typeface="B Nazanin" panose="00000400000000000000" pitchFamily="2" charset="-78"/>
+              </a:rPr>
+              <a:t>انقباضی</a:t>
+            </a:r>
+            <a:r>
+              <a:rPr lang="en-US" sz="1800" b="1" dirty="0">
+                <a:cs typeface="B Nazanin" panose="00000400000000000000" pitchFamily="2" charset="-78"/>
+              </a:rPr>
+              <a:t> فدرال </a:t>
+            </a:r>
+            <a:r>
+              <a:rPr lang="en-US" sz="1800" b="1" dirty="0" err="1">
+                <a:cs typeface="B Nazanin" panose="00000400000000000000" pitchFamily="2" charset="-78"/>
+              </a:rPr>
+              <a:t>رزرو</a:t>
+            </a:r>
+            <a:r>
+              <a:rPr lang="en-US" sz="1800" b="1" dirty="0">
+                <a:cs typeface="B Nazanin" panose="00000400000000000000" pitchFamily="2" charset="-78"/>
+              </a:rPr>
+              <a:t>:</a:t>
+            </a:r>
+            <a:r>
+              <a:rPr lang="en-US" sz="1800" dirty="0">
+                <a:cs typeface="B Nazanin" panose="00000400000000000000" pitchFamily="2" charset="-78"/>
+              </a:rPr>
+              <a:t> </a:t>
+            </a:r>
+            <a:r>
+              <a:rPr lang="en-US" sz="1800" dirty="0" err="1">
+                <a:cs typeface="B Nazanin" panose="00000400000000000000" pitchFamily="2" charset="-78"/>
+              </a:rPr>
+              <a:t>ادامه</a:t>
+            </a:r>
+            <a:r>
+              <a:rPr lang="en-US" sz="1800" dirty="0">
+                <a:cs typeface="B Nazanin" panose="00000400000000000000" pitchFamily="2" charset="-78"/>
+              </a:rPr>
+              <a:t> </a:t>
+            </a:r>
+            <a:r>
+              <a:rPr lang="en-US" sz="1800" dirty="0" err="1">
+                <a:cs typeface="B Nazanin" panose="00000400000000000000" pitchFamily="2" charset="-78"/>
+              </a:rPr>
+              <a:t>سیاست‌های</a:t>
+            </a:r>
+            <a:r>
+              <a:rPr lang="en-US" sz="1800" dirty="0">
+                <a:cs typeface="B Nazanin" panose="00000400000000000000" pitchFamily="2" charset="-78"/>
+              </a:rPr>
+              <a:t> </a:t>
+            </a:r>
+            <a:r>
+              <a:rPr lang="en-US" sz="1800" dirty="0" err="1">
+                <a:cs typeface="B Nazanin" panose="00000400000000000000" pitchFamily="2" charset="-78"/>
+              </a:rPr>
+              <a:t>انقباضی</a:t>
+            </a:r>
+            <a:r>
+              <a:rPr lang="en-US" sz="1800" dirty="0">
+                <a:cs typeface="B Nazanin" panose="00000400000000000000" pitchFamily="2" charset="-78"/>
+              </a:rPr>
+              <a:t> و </a:t>
+            </a:r>
+            <a:r>
+              <a:rPr lang="en-US" sz="1800" dirty="0" err="1">
+                <a:cs typeface="B Nazanin" panose="00000400000000000000" pitchFamily="2" charset="-78"/>
+              </a:rPr>
+              <a:t>افزایش</a:t>
+            </a:r>
+            <a:r>
+              <a:rPr lang="en-US" sz="1800" dirty="0">
+                <a:cs typeface="B Nazanin" panose="00000400000000000000" pitchFamily="2" charset="-78"/>
+              </a:rPr>
+              <a:t> </a:t>
+            </a:r>
+            <a:r>
+              <a:rPr lang="en-US" sz="1800" dirty="0" err="1">
+                <a:cs typeface="B Nazanin" panose="00000400000000000000" pitchFamily="2" charset="-78"/>
+              </a:rPr>
+              <a:t>نرخ</a:t>
+            </a:r>
+            <a:r>
+              <a:rPr lang="en-US" sz="1800" dirty="0">
+                <a:cs typeface="B Nazanin" panose="00000400000000000000" pitchFamily="2" charset="-78"/>
+              </a:rPr>
+              <a:t> </a:t>
+            </a:r>
+            <a:r>
+              <a:rPr lang="en-US" sz="1800" dirty="0" err="1">
+                <a:cs typeface="B Nazanin" panose="00000400000000000000" pitchFamily="2" charset="-78"/>
+              </a:rPr>
+              <a:t>بهره</a:t>
+            </a:r>
+            <a:r>
+              <a:rPr lang="en-US" sz="1800" dirty="0">
+                <a:cs typeface="B Nazanin" panose="00000400000000000000" pitchFamily="2" charset="-78"/>
+              </a:rPr>
+              <a:t> </a:t>
+            </a:r>
+            <a:r>
+              <a:rPr lang="en-US" sz="1800" dirty="0" err="1">
+                <a:cs typeface="B Nazanin" panose="00000400000000000000" pitchFamily="2" charset="-78"/>
+              </a:rPr>
+              <a:t>می‌تواند</a:t>
+            </a:r>
+            <a:r>
+              <a:rPr lang="en-US" sz="1800" dirty="0">
+                <a:cs typeface="B Nazanin" panose="00000400000000000000" pitchFamily="2" charset="-78"/>
+              </a:rPr>
+              <a:t> </a:t>
+            </a:r>
+            <a:r>
+              <a:rPr lang="en-US" sz="1800" dirty="0" err="1">
+                <a:cs typeface="B Nazanin" panose="00000400000000000000" pitchFamily="2" charset="-78"/>
+              </a:rPr>
+              <a:t>ادامه</a:t>
+            </a:r>
+            <a:r>
+              <a:rPr lang="en-US" sz="1800" dirty="0">
+                <a:cs typeface="B Nazanin" panose="00000400000000000000" pitchFamily="2" charset="-78"/>
+              </a:rPr>
+              <a:t> </a:t>
+            </a:r>
+            <a:r>
+              <a:rPr lang="en-US" sz="1800" dirty="0" err="1">
+                <a:cs typeface="B Nazanin" panose="00000400000000000000" pitchFamily="2" charset="-78"/>
+              </a:rPr>
+              <a:t>دهنده</a:t>
+            </a:r>
+            <a:r>
+              <a:rPr lang="en-US" sz="1800" dirty="0">
+                <a:cs typeface="B Nazanin" panose="00000400000000000000" pitchFamily="2" charset="-78"/>
+              </a:rPr>
+              <a:t> </a:t>
+            </a:r>
+            <a:r>
+              <a:rPr lang="en-US" sz="1800" dirty="0" err="1">
+                <a:cs typeface="B Nazanin" panose="00000400000000000000" pitchFamily="2" charset="-78"/>
+              </a:rPr>
+              <a:t>روند</a:t>
+            </a:r>
+            <a:r>
+              <a:rPr lang="en-US" sz="1800" dirty="0">
+                <a:cs typeface="B Nazanin" panose="00000400000000000000" pitchFamily="2" charset="-78"/>
+              </a:rPr>
+              <a:t> </a:t>
+            </a:r>
+            <a:r>
+              <a:rPr lang="en-US" sz="1800" dirty="0" err="1">
+                <a:cs typeface="B Nazanin" panose="00000400000000000000" pitchFamily="2" charset="-78"/>
+              </a:rPr>
+              <a:t>نزولی</a:t>
+            </a:r>
+            <a:r>
+              <a:rPr lang="en-US" sz="1800" dirty="0">
+                <a:cs typeface="B Nazanin" panose="00000400000000000000" pitchFamily="2" charset="-78"/>
+              </a:rPr>
+              <a:t> </a:t>
+            </a:r>
+            <a:r>
+              <a:rPr lang="en-US" sz="1800" dirty="0" err="1">
+                <a:cs typeface="B Nazanin" panose="00000400000000000000" pitchFamily="2" charset="-78"/>
+              </a:rPr>
+              <a:t>قیمت</a:t>
+            </a:r>
+            <a:r>
+              <a:rPr lang="en-US" sz="1800" dirty="0">
+                <a:cs typeface="B Nazanin" panose="00000400000000000000" pitchFamily="2" charset="-78"/>
+              </a:rPr>
+              <a:t> </a:t>
+            </a:r>
+            <a:r>
+              <a:rPr lang="en-US" sz="1800" dirty="0" err="1">
+                <a:cs typeface="B Nazanin" panose="00000400000000000000" pitchFamily="2" charset="-78"/>
+              </a:rPr>
+              <a:t>طلا</a:t>
+            </a:r>
+            <a:r>
+              <a:rPr lang="en-US" sz="1800" dirty="0">
+                <a:cs typeface="B Nazanin" panose="00000400000000000000" pitchFamily="2" charset="-78"/>
+              </a:rPr>
+              <a:t> </a:t>
+            </a:r>
+            <a:r>
+              <a:rPr lang="en-US" sz="1800" dirty="0" err="1">
+                <a:cs typeface="B Nazanin" panose="00000400000000000000" pitchFamily="2" charset="-78"/>
+              </a:rPr>
+              <a:t>باشد</a:t>
+            </a:r>
+            <a:r>
+              <a:rPr lang="en-US" sz="1800" dirty="0">
+                <a:cs typeface="B Nazanin" panose="00000400000000000000" pitchFamily="2" charset="-78"/>
+              </a:rPr>
+              <a:t>.</a:t>
+            </a:r>
+          </a:p>
+          <a:p>
+            <a:pPr algn="r" rtl="1"/>
+            <a:r>
+              <a:rPr lang="en-US" sz="1800" b="1" dirty="0" err="1">
+                <a:cs typeface="B Nazanin" panose="00000400000000000000" pitchFamily="2" charset="-78"/>
+              </a:rPr>
+              <a:t>تقویت</a:t>
+            </a:r>
+            <a:r>
+              <a:rPr lang="en-US" sz="1800" b="1" dirty="0">
+                <a:cs typeface="B Nazanin" panose="00000400000000000000" pitchFamily="2" charset="-78"/>
+              </a:rPr>
+              <a:t> </a:t>
+            </a:r>
+            <a:r>
+              <a:rPr lang="en-US" sz="1800" b="1" dirty="0" err="1">
+                <a:cs typeface="B Nazanin" panose="00000400000000000000" pitchFamily="2" charset="-78"/>
+              </a:rPr>
+              <a:t>مداوم</a:t>
+            </a:r>
+            <a:r>
+              <a:rPr lang="en-US" sz="1800" b="1" dirty="0">
+                <a:cs typeface="B Nazanin" panose="00000400000000000000" pitchFamily="2" charset="-78"/>
+              </a:rPr>
+              <a:t> </a:t>
+            </a:r>
+            <a:r>
+              <a:rPr lang="en-US" sz="1800" b="1" dirty="0" err="1">
+                <a:cs typeface="B Nazanin" panose="00000400000000000000" pitchFamily="2" charset="-78"/>
+              </a:rPr>
+              <a:t>دلار</a:t>
+            </a:r>
+            <a:r>
+              <a:rPr lang="en-US" sz="1800" b="1" dirty="0">
+                <a:cs typeface="B Nazanin" panose="00000400000000000000" pitchFamily="2" charset="-78"/>
+              </a:rPr>
+              <a:t>:</a:t>
+            </a:r>
+            <a:r>
+              <a:rPr lang="en-US" sz="1800" dirty="0">
+                <a:cs typeface="B Nazanin" panose="00000400000000000000" pitchFamily="2" charset="-78"/>
+              </a:rPr>
+              <a:t> </a:t>
+            </a:r>
+            <a:r>
+              <a:rPr lang="en-US" sz="1800" dirty="0" err="1">
+                <a:cs typeface="B Nazanin" panose="00000400000000000000" pitchFamily="2" charset="-78"/>
+              </a:rPr>
+              <a:t>هرگونه</a:t>
+            </a:r>
+            <a:r>
+              <a:rPr lang="en-US" sz="1800" dirty="0">
+                <a:cs typeface="B Nazanin" panose="00000400000000000000" pitchFamily="2" charset="-78"/>
+              </a:rPr>
+              <a:t> </a:t>
+            </a:r>
+            <a:r>
+              <a:rPr lang="en-US" sz="1800" dirty="0" err="1">
+                <a:cs typeface="B Nazanin" panose="00000400000000000000" pitchFamily="2" charset="-78"/>
+              </a:rPr>
+              <a:t>تقویت</a:t>
+            </a:r>
+            <a:r>
+              <a:rPr lang="en-US" sz="1800" dirty="0">
+                <a:cs typeface="B Nazanin" panose="00000400000000000000" pitchFamily="2" charset="-78"/>
+              </a:rPr>
+              <a:t> </a:t>
+            </a:r>
+            <a:r>
+              <a:rPr lang="en-US" sz="1800" dirty="0" err="1">
+                <a:cs typeface="B Nazanin" panose="00000400000000000000" pitchFamily="2" charset="-78"/>
+              </a:rPr>
+              <a:t>بیشتر</a:t>
+            </a:r>
+            <a:r>
+              <a:rPr lang="en-US" sz="1800" dirty="0">
+                <a:cs typeface="B Nazanin" panose="00000400000000000000" pitchFamily="2" charset="-78"/>
+              </a:rPr>
+              <a:t> </a:t>
+            </a:r>
+            <a:r>
+              <a:rPr lang="en-US" sz="1800" dirty="0" err="1">
+                <a:cs typeface="B Nazanin" panose="00000400000000000000" pitchFamily="2" charset="-78"/>
+              </a:rPr>
+              <a:t>دلار</a:t>
+            </a:r>
+            <a:r>
+              <a:rPr lang="en-US" sz="1800" dirty="0">
+                <a:cs typeface="B Nazanin" panose="00000400000000000000" pitchFamily="2" charset="-78"/>
+              </a:rPr>
+              <a:t> </a:t>
+            </a:r>
+            <a:r>
+              <a:rPr lang="en-US" sz="1800" dirty="0" err="1">
+                <a:cs typeface="B Nazanin" panose="00000400000000000000" pitchFamily="2" charset="-78"/>
+              </a:rPr>
+              <a:t>آمریکا</a:t>
+            </a:r>
+            <a:r>
+              <a:rPr lang="en-US" sz="1800" dirty="0">
+                <a:cs typeface="B Nazanin" panose="00000400000000000000" pitchFamily="2" charset="-78"/>
+              </a:rPr>
+              <a:t> </a:t>
+            </a:r>
+            <a:r>
+              <a:rPr lang="en-US" sz="1800" dirty="0" err="1">
+                <a:cs typeface="B Nazanin" panose="00000400000000000000" pitchFamily="2" charset="-78"/>
+              </a:rPr>
+              <a:t>می‌تواند</a:t>
+            </a:r>
+            <a:r>
+              <a:rPr lang="en-US" sz="1800" dirty="0">
+                <a:cs typeface="B Nazanin" panose="00000400000000000000" pitchFamily="2" charset="-78"/>
+              </a:rPr>
+              <a:t> </a:t>
+            </a:r>
+            <a:r>
+              <a:rPr lang="en-US" sz="1800" dirty="0" err="1">
+                <a:cs typeface="B Nazanin" panose="00000400000000000000" pitchFamily="2" charset="-78"/>
+              </a:rPr>
+              <a:t>فشار</a:t>
+            </a:r>
+            <a:r>
+              <a:rPr lang="en-US" sz="1800" dirty="0">
+                <a:cs typeface="B Nazanin" panose="00000400000000000000" pitchFamily="2" charset="-78"/>
+              </a:rPr>
+              <a:t> </a:t>
+            </a:r>
+            <a:r>
+              <a:rPr lang="en-US" sz="1800" dirty="0" err="1">
+                <a:cs typeface="B Nazanin" panose="00000400000000000000" pitchFamily="2" charset="-78"/>
+              </a:rPr>
+              <a:t>بیشتری</a:t>
+            </a:r>
+            <a:r>
+              <a:rPr lang="en-US" sz="1800" dirty="0">
+                <a:cs typeface="B Nazanin" panose="00000400000000000000" pitchFamily="2" charset="-78"/>
+              </a:rPr>
+              <a:t> </a:t>
+            </a:r>
+            <a:r>
+              <a:rPr lang="en-US" sz="1800" dirty="0" err="1">
+                <a:cs typeface="B Nazanin" panose="00000400000000000000" pitchFamily="2" charset="-78"/>
+              </a:rPr>
+              <a:t>بر</a:t>
+            </a:r>
+            <a:r>
+              <a:rPr lang="en-US" sz="1800" dirty="0">
+                <a:cs typeface="B Nazanin" panose="00000400000000000000" pitchFamily="2" charset="-78"/>
+              </a:rPr>
+              <a:t> </a:t>
+            </a:r>
+            <a:r>
+              <a:rPr lang="en-US" sz="1800" dirty="0" err="1">
+                <a:cs typeface="B Nazanin" panose="00000400000000000000" pitchFamily="2" charset="-78"/>
+              </a:rPr>
+              <a:t>طلا</a:t>
+            </a:r>
+            <a:r>
+              <a:rPr lang="en-US" sz="1800" dirty="0">
+                <a:cs typeface="B Nazanin" panose="00000400000000000000" pitchFamily="2" charset="-78"/>
+              </a:rPr>
+              <a:t> </a:t>
+            </a:r>
+            <a:r>
+              <a:rPr lang="en-US" sz="1800" dirty="0" err="1">
+                <a:cs typeface="B Nazanin" panose="00000400000000000000" pitchFamily="2" charset="-78"/>
+              </a:rPr>
+              <a:t>وارد</a:t>
+            </a:r>
+            <a:r>
+              <a:rPr lang="en-US" sz="1800" dirty="0">
+                <a:cs typeface="B Nazanin" panose="00000400000000000000" pitchFamily="2" charset="-78"/>
+              </a:rPr>
+              <a:t> </a:t>
+            </a:r>
+            <a:r>
+              <a:rPr lang="en-US" sz="1800" dirty="0" err="1">
+                <a:cs typeface="B Nazanin" panose="00000400000000000000" pitchFamily="2" charset="-78"/>
+              </a:rPr>
+              <a:t>کند</a:t>
+            </a:r>
+            <a:r>
+              <a:rPr lang="en-US" sz="1800" dirty="0">
+                <a:cs typeface="B Nazanin" panose="00000400000000000000" pitchFamily="2" charset="-78"/>
+              </a:rPr>
+              <a:t>.</a:t>
+            </a:r>
+          </a:p>
+          <a:p>
+            <a:pPr algn="r" rtl="1"/>
+            <a:r>
+              <a:rPr lang="en-US" sz="1800" b="1" dirty="0" err="1">
+                <a:cs typeface="B Nazanin" panose="00000400000000000000" pitchFamily="2" charset="-78"/>
+              </a:rPr>
+              <a:t>چشم‌انداز</a:t>
+            </a:r>
+            <a:r>
+              <a:rPr lang="en-US" sz="1800" b="1" dirty="0">
+                <a:cs typeface="B Nazanin" panose="00000400000000000000" pitchFamily="2" charset="-78"/>
+              </a:rPr>
+              <a:t> </a:t>
+            </a:r>
+            <a:r>
+              <a:rPr lang="en-US" sz="1800" b="1" dirty="0" err="1">
+                <a:cs typeface="B Nazanin" panose="00000400000000000000" pitchFamily="2" charset="-78"/>
+              </a:rPr>
+              <a:t>کوتاه‌مدت</a:t>
+            </a:r>
+            <a:r>
+              <a:rPr lang="en-US" sz="1800" b="1" dirty="0">
+                <a:cs typeface="B Nazanin" panose="00000400000000000000" pitchFamily="2" charset="-78"/>
+              </a:rPr>
+              <a:t>:</a:t>
+            </a:r>
+            <a:r>
+              <a:rPr lang="en-US" sz="1800" dirty="0">
+                <a:cs typeface="B Nazanin" panose="00000400000000000000" pitchFamily="2" charset="-78"/>
+              </a:rPr>
+              <a:t> </a:t>
+            </a:r>
+            <a:r>
+              <a:rPr lang="en-US" sz="1800" dirty="0" err="1">
+                <a:cs typeface="B Nazanin" panose="00000400000000000000" pitchFamily="2" charset="-78"/>
+              </a:rPr>
+              <a:t>با</a:t>
+            </a:r>
+            <a:r>
+              <a:rPr lang="en-US" sz="1800" dirty="0">
+                <a:cs typeface="B Nazanin" panose="00000400000000000000" pitchFamily="2" charset="-78"/>
+              </a:rPr>
+              <a:t> </a:t>
+            </a:r>
+            <a:r>
+              <a:rPr lang="en-US" sz="1800" dirty="0" err="1">
+                <a:cs typeface="B Nazanin" panose="00000400000000000000" pitchFamily="2" charset="-78"/>
+              </a:rPr>
+              <a:t>توجه</a:t>
+            </a:r>
+            <a:r>
+              <a:rPr lang="en-US" sz="1800" dirty="0">
+                <a:cs typeface="B Nazanin" panose="00000400000000000000" pitchFamily="2" charset="-78"/>
+              </a:rPr>
+              <a:t> </a:t>
+            </a:r>
+            <a:r>
+              <a:rPr lang="en-US" sz="1800" dirty="0" err="1">
+                <a:cs typeface="B Nazanin" panose="00000400000000000000" pitchFamily="2" charset="-78"/>
+              </a:rPr>
+              <a:t>به</a:t>
+            </a:r>
+            <a:r>
+              <a:rPr lang="en-US" sz="1800" dirty="0">
+                <a:cs typeface="B Nazanin" panose="00000400000000000000" pitchFamily="2" charset="-78"/>
+              </a:rPr>
+              <a:t> </a:t>
+            </a:r>
+            <a:r>
+              <a:rPr lang="en-US" sz="1800" dirty="0" err="1">
+                <a:cs typeface="B Nazanin" panose="00000400000000000000" pitchFamily="2" charset="-78"/>
+              </a:rPr>
+              <a:t>فشارهای</a:t>
+            </a:r>
+            <a:r>
+              <a:rPr lang="en-US" sz="1800" dirty="0">
+                <a:cs typeface="B Nazanin" panose="00000400000000000000" pitchFamily="2" charset="-78"/>
+              </a:rPr>
+              <a:t> </a:t>
+            </a:r>
+            <a:r>
+              <a:rPr lang="en-US" sz="1800" dirty="0" err="1">
+                <a:cs typeface="B Nazanin" panose="00000400000000000000" pitchFamily="2" charset="-78"/>
+              </a:rPr>
+              <a:t>فعلی</a:t>
+            </a:r>
+            <a:r>
+              <a:rPr lang="en-US" sz="1800" dirty="0">
+                <a:cs typeface="B Nazanin" panose="00000400000000000000" pitchFamily="2" charset="-78"/>
+              </a:rPr>
+              <a:t> </a:t>
+            </a:r>
+            <a:r>
+              <a:rPr lang="en-US" sz="1800" dirty="0" err="1">
+                <a:cs typeface="B Nazanin" panose="00000400000000000000" pitchFamily="2" charset="-78"/>
+              </a:rPr>
+              <a:t>ناشی</a:t>
+            </a:r>
+            <a:r>
+              <a:rPr lang="en-US" sz="1800" dirty="0">
+                <a:cs typeface="B Nazanin" panose="00000400000000000000" pitchFamily="2" charset="-78"/>
+              </a:rPr>
+              <a:t> </a:t>
+            </a:r>
+            <a:r>
+              <a:rPr lang="en-US" sz="1800" dirty="0" err="1">
+                <a:cs typeface="B Nazanin" panose="00000400000000000000" pitchFamily="2" charset="-78"/>
+              </a:rPr>
+              <a:t>از</a:t>
+            </a:r>
+            <a:r>
+              <a:rPr lang="en-US" sz="1800" dirty="0">
+                <a:cs typeface="B Nazanin" panose="00000400000000000000" pitchFamily="2" charset="-78"/>
+              </a:rPr>
+              <a:t> </a:t>
+            </a:r>
+            <a:r>
+              <a:rPr lang="en-US" sz="1800" dirty="0" err="1">
+                <a:cs typeface="B Nazanin" panose="00000400000000000000" pitchFamily="2" charset="-78"/>
+              </a:rPr>
+              <a:t>دلار</a:t>
+            </a:r>
+            <a:r>
+              <a:rPr lang="en-US" sz="1800" dirty="0">
+                <a:cs typeface="B Nazanin" panose="00000400000000000000" pitchFamily="2" charset="-78"/>
+              </a:rPr>
+              <a:t> </a:t>
+            </a:r>
+            <a:r>
+              <a:rPr lang="en-US" sz="1800" dirty="0" err="1">
+                <a:cs typeface="B Nazanin" panose="00000400000000000000" pitchFamily="2" charset="-78"/>
+              </a:rPr>
+              <a:t>قوی</a:t>
+            </a:r>
+            <a:r>
+              <a:rPr lang="en-US" sz="1800" dirty="0">
+                <a:cs typeface="B Nazanin" panose="00000400000000000000" pitchFamily="2" charset="-78"/>
+              </a:rPr>
+              <a:t> و </a:t>
+            </a:r>
+            <a:r>
+              <a:rPr lang="en-US" sz="1800" dirty="0" err="1">
+                <a:cs typeface="B Nazanin" panose="00000400000000000000" pitchFamily="2" charset="-78"/>
+              </a:rPr>
+              <a:t>انتظارات</a:t>
+            </a:r>
+            <a:r>
+              <a:rPr lang="en-US" sz="1800" dirty="0">
+                <a:cs typeface="B Nazanin" panose="00000400000000000000" pitchFamily="2" charset="-78"/>
+              </a:rPr>
+              <a:t> </a:t>
+            </a:r>
+            <a:r>
+              <a:rPr lang="en-US" sz="1800" dirty="0" err="1">
+                <a:cs typeface="B Nazanin" panose="00000400000000000000" pitchFamily="2" charset="-78"/>
+              </a:rPr>
+              <a:t>افزایش</a:t>
+            </a:r>
+            <a:r>
+              <a:rPr lang="en-US" sz="1800" dirty="0">
+                <a:cs typeface="B Nazanin" panose="00000400000000000000" pitchFamily="2" charset="-78"/>
+              </a:rPr>
+              <a:t> </a:t>
+            </a:r>
+            <a:r>
+              <a:rPr lang="en-US" sz="1800" dirty="0" err="1">
+                <a:cs typeface="B Nazanin" panose="00000400000000000000" pitchFamily="2" charset="-78"/>
+              </a:rPr>
+              <a:t>نرخ</a:t>
+            </a:r>
+            <a:r>
+              <a:rPr lang="en-US" sz="1800" dirty="0">
+                <a:cs typeface="B Nazanin" panose="00000400000000000000" pitchFamily="2" charset="-78"/>
+              </a:rPr>
+              <a:t> </a:t>
+            </a:r>
+            <a:r>
+              <a:rPr lang="en-US" sz="1800" dirty="0" err="1">
+                <a:cs typeface="B Nazanin" panose="00000400000000000000" pitchFamily="2" charset="-78"/>
+              </a:rPr>
+              <a:t>بهره</a:t>
+            </a:r>
+            <a:r>
+              <a:rPr lang="en-US" sz="1800" dirty="0">
+                <a:cs typeface="B Nazanin" panose="00000400000000000000" pitchFamily="2" charset="-78"/>
+              </a:rPr>
+              <a:t>، </a:t>
+            </a:r>
+            <a:r>
+              <a:rPr lang="en-US" sz="1800" dirty="0" err="1">
+                <a:cs typeface="B Nazanin" panose="00000400000000000000" pitchFamily="2" charset="-78"/>
+              </a:rPr>
+              <a:t>چشم‌انداز</a:t>
+            </a:r>
+            <a:r>
+              <a:rPr lang="en-US" sz="1800" dirty="0">
+                <a:cs typeface="B Nazanin" panose="00000400000000000000" pitchFamily="2" charset="-78"/>
+              </a:rPr>
+              <a:t> </a:t>
+            </a:r>
+            <a:r>
+              <a:rPr lang="en-US" sz="1800" dirty="0" err="1">
+                <a:cs typeface="B Nazanin" panose="00000400000000000000" pitchFamily="2" charset="-78"/>
+              </a:rPr>
+              <a:t>کوتاه‌مدت</a:t>
+            </a:r>
+            <a:r>
+              <a:rPr lang="en-US" sz="1800" dirty="0">
+                <a:cs typeface="B Nazanin" panose="00000400000000000000" pitchFamily="2" charset="-78"/>
+              </a:rPr>
+              <a:t> </a:t>
+            </a:r>
+            <a:r>
+              <a:rPr lang="en-US" sz="1800" dirty="0" err="1">
+                <a:cs typeface="B Nazanin" panose="00000400000000000000" pitchFamily="2" charset="-78"/>
+              </a:rPr>
+              <a:t>برای</a:t>
+            </a:r>
+            <a:r>
+              <a:rPr lang="en-US" sz="1800" dirty="0">
+                <a:cs typeface="B Nazanin" panose="00000400000000000000" pitchFamily="2" charset="-78"/>
+              </a:rPr>
+              <a:t> </a:t>
+            </a:r>
+            <a:r>
+              <a:rPr lang="en-US" sz="1800" dirty="0" err="1">
+                <a:cs typeface="B Nazanin" panose="00000400000000000000" pitchFamily="2" charset="-78"/>
+              </a:rPr>
+              <a:t>طلا</a:t>
+            </a:r>
+            <a:r>
+              <a:rPr lang="en-US" sz="1800" dirty="0">
+                <a:cs typeface="B Nazanin" panose="00000400000000000000" pitchFamily="2" charset="-78"/>
+              </a:rPr>
+              <a:t> </a:t>
+            </a:r>
+            <a:r>
+              <a:rPr lang="en-US" sz="1800" dirty="0" err="1">
+                <a:cs typeface="B Nazanin" panose="00000400000000000000" pitchFamily="2" charset="-78"/>
+              </a:rPr>
+              <a:t>همچنان</a:t>
+            </a:r>
+            <a:r>
+              <a:rPr lang="en-US" sz="1800" dirty="0">
+                <a:cs typeface="B Nazanin" panose="00000400000000000000" pitchFamily="2" charset="-78"/>
+              </a:rPr>
+              <a:t> </a:t>
+            </a:r>
+            <a:r>
+              <a:rPr lang="en-US" sz="1800" dirty="0" err="1">
+                <a:cs typeface="B Nazanin" panose="00000400000000000000" pitchFamily="2" charset="-78"/>
+              </a:rPr>
+              <a:t>با</a:t>
+            </a:r>
+            <a:r>
+              <a:rPr lang="en-US" sz="1800" dirty="0">
+                <a:cs typeface="B Nazanin" panose="00000400000000000000" pitchFamily="2" charset="-78"/>
+              </a:rPr>
+              <a:t> </a:t>
+            </a:r>
+            <a:r>
+              <a:rPr lang="en-US" sz="1800" dirty="0" err="1">
+                <a:cs typeface="B Nazanin" panose="00000400000000000000" pitchFamily="2" charset="-78"/>
+              </a:rPr>
+              <a:t>عدم</a:t>
+            </a:r>
+            <a:r>
+              <a:rPr lang="en-US" sz="1800" dirty="0">
+                <a:cs typeface="B Nazanin" panose="00000400000000000000" pitchFamily="2" charset="-78"/>
+              </a:rPr>
+              <a:t> </a:t>
+            </a:r>
+            <a:r>
+              <a:rPr lang="en-US" sz="1800" dirty="0" err="1">
+                <a:cs typeface="B Nazanin" panose="00000400000000000000" pitchFamily="2" charset="-78"/>
+              </a:rPr>
+              <a:t>اطمینان</a:t>
+            </a:r>
+            <a:r>
+              <a:rPr lang="en-US" sz="1800" dirty="0">
+                <a:cs typeface="B Nazanin" panose="00000400000000000000" pitchFamily="2" charset="-78"/>
+              </a:rPr>
+              <a:t> </a:t>
+            </a:r>
+            <a:r>
+              <a:rPr lang="en-US" sz="1800" dirty="0" err="1">
+                <a:cs typeface="B Nazanin" panose="00000400000000000000" pitchFamily="2" charset="-78"/>
+              </a:rPr>
+              <a:t>همراه</a:t>
+            </a:r>
+            <a:r>
+              <a:rPr lang="en-US" sz="1800" dirty="0">
+                <a:cs typeface="B Nazanin" panose="00000400000000000000" pitchFamily="2" charset="-78"/>
+              </a:rPr>
+              <a:t> </a:t>
+            </a:r>
+            <a:r>
+              <a:rPr lang="en-US" sz="1800" dirty="0" err="1">
+                <a:cs typeface="B Nazanin" panose="00000400000000000000" pitchFamily="2" charset="-78"/>
+              </a:rPr>
+              <a:t>است</a:t>
+            </a:r>
+            <a:r>
+              <a:rPr lang="en-US" sz="1800" dirty="0">
+                <a:cs typeface="B Nazanin" panose="00000400000000000000" pitchFamily="2" charset="-78"/>
+              </a:rPr>
+              <a:t>. </a:t>
+            </a:r>
+            <a:r>
+              <a:rPr lang="en-US" sz="1800" dirty="0" err="1">
+                <a:cs typeface="B Nazanin" panose="00000400000000000000" pitchFamily="2" charset="-78"/>
+              </a:rPr>
+              <a:t>در</a:t>
+            </a:r>
+            <a:r>
+              <a:rPr lang="en-US" sz="1800" dirty="0">
+                <a:cs typeface="B Nazanin" panose="00000400000000000000" pitchFamily="2" charset="-78"/>
+              </a:rPr>
+              <a:t> </a:t>
+            </a:r>
+            <a:r>
+              <a:rPr lang="en-US" sz="1800" dirty="0" err="1">
+                <a:cs typeface="B Nazanin" panose="00000400000000000000" pitchFamily="2" charset="-78"/>
+              </a:rPr>
+              <a:t>حالی</a:t>
+            </a:r>
+            <a:r>
+              <a:rPr lang="en-US" sz="1800" dirty="0">
+                <a:cs typeface="B Nazanin" panose="00000400000000000000" pitchFamily="2" charset="-78"/>
+              </a:rPr>
+              <a:t> </a:t>
+            </a:r>
+            <a:r>
+              <a:rPr lang="en-US" sz="1800" dirty="0" err="1">
+                <a:cs typeface="B Nazanin" panose="00000400000000000000" pitchFamily="2" charset="-78"/>
+              </a:rPr>
+              <a:t>که</a:t>
+            </a:r>
+            <a:r>
+              <a:rPr lang="en-US" sz="1800" dirty="0">
+                <a:cs typeface="B Nazanin" panose="00000400000000000000" pitchFamily="2" charset="-78"/>
+              </a:rPr>
+              <a:t> </a:t>
+            </a:r>
+            <a:r>
+              <a:rPr lang="en-US" sz="1800" dirty="0" err="1">
+                <a:cs typeface="B Nazanin" panose="00000400000000000000" pitchFamily="2" charset="-78"/>
+              </a:rPr>
+              <a:t>طلا</a:t>
+            </a:r>
+            <a:r>
+              <a:rPr lang="en-US" sz="1800" dirty="0">
+                <a:cs typeface="B Nazanin" panose="00000400000000000000" pitchFamily="2" charset="-78"/>
+              </a:rPr>
+              <a:t> </a:t>
+            </a:r>
+            <a:r>
+              <a:rPr lang="en-US" sz="1800" dirty="0" err="1">
+                <a:cs typeface="B Nazanin" panose="00000400000000000000" pitchFamily="2" charset="-78"/>
+              </a:rPr>
+              <a:t>به</a:t>
+            </a:r>
+            <a:r>
+              <a:rPr lang="en-US" sz="1800" dirty="0">
+                <a:cs typeface="B Nazanin" panose="00000400000000000000" pitchFamily="2" charset="-78"/>
+              </a:rPr>
+              <a:t> </a:t>
+            </a:r>
+            <a:r>
+              <a:rPr lang="en-US" sz="1800" dirty="0" err="1">
+                <a:cs typeface="B Nazanin" panose="00000400000000000000" pitchFamily="2" charset="-78"/>
+              </a:rPr>
+              <a:t>طور</a:t>
+            </a:r>
+            <a:r>
+              <a:rPr lang="en-US" sz="1800" dirty="0">
+                <a:cs typeface="B Nazanin" panose="00000400000000000000" pitchFamily="2" charset="-78"/>
+              </a:rPr>
+              <a:t> </a:t>
+            </a:r>
+            <a:r>
+              <a:rPr lang="en-US" sz="1800" dirty="0" err="1">
+                <a:cs typeface="B Nazanin" panose="00000400000000000000" pitchFamily="2" charset="-78"/>
+              </a:rPr>
+              <a:t>سنتی</a:t>
+            </a:r>
+            <a:r>
+              <a:rPr lang="en-US" sz="1800" dirty="0">
+                <a:cs typeface="B Nazanin" panose="00000400000000000000" pitchFamily="2" charset="-78"/>
+              </a:rPr>
+              <a:t> </a:t>
+            </a:r>
+            <a:r>
+              <a:rPr lang="en-US" sz="1800" dirty="0" err="1">
+                <a:cs typeface="B Nazanin" panose="00000400000000000000" pitchFamily="2" charset="-78"/>
+              </a:rPr>
+              <a:t>در</a:t>
+            </a:r>
+            <a:r>
+              <a:rPr lang="en-US" sz="1800" dirty="0">
+                <a:cs typeface="B Nazanin" panose="00000400000000000000" pitchFamily="2" charset="-78"/>
+              </a:rPr>
+              <a:t> زمان </a:t>
+            </a:r>
+            <a:r>
+              <a:rPr lang="en-US" sz="1800" dirty="0" err="1">
+                <a:cs typeface="B Nazanin" panose="00000400000000000000" pitchFamily="2" charset="-78"/>
+              </a:rPr>
+              <a:t>عدم</a:t>
+            </a:r>
+            <a:r>
+              <a:rPr lang="en-US" sz="1800" dirty="0">
+                <a:cs typeface="B Nazanin" panose="00000400000000000000" pitchFamily="2" charset="-78"/>
+              </a:rPr>
+              <a:t> </a:t>
+            </a:r>
+            <a:r>
+              <a:rPr lang="en-US" sz="1800" dirty="0" err="1">
+                <a:cs typeface="B Nazanin" panose="00000400000000000000" pitchFamily="2" charset="-78"/>
+              </a:rPr>
+              <a:t>اطمینان</a:t>
+            </a:r>
+            <a:r>
+              <a:rPr lang="en-US" sz="1800" dirty="0">
+                <a:cs typeface="B Nazanin" panose="00000400000000000000" pitchFamily="2" charset="-78"/>
+              </a:rPr>
+              <a:t> </a:t>
+            </a:r>
+            <a:r>
+              <a:rPr lang="en-US" sz="1800" dirty="0" err="1">
+                <a:cs typeface="B Nazanin" panose="00000400000000000000" pitchFamily="2" charset="-78"/>
+              </a:rPr>
+              <a:t>اقتصادی</a:t>
+            </a:r>
+            <a:r>
+              <a:rPr lang="en-US" sz="1800" dirty="0">
+                <a:cs typeface="B Nazanin" panose="00000400000000000000" pitchFamily="2" charset="-78"/>
+              </a:rPr>
+              <a:t> و </a:t>
+            </a:r>
+            <a:r>
+              <a:rPr lang="en-US" sz="1800" dirty="0" err="1">
+                <a:cs typeface="B Nazanin" panose="00000400000000000000" pitchFamily="2" charset="-78"/>
+              </a:rPr>
+              <a:t>ژئوپلیتیکی</a:t>
+            </a:r>
+            <a:r>
+              <a:rPr lang="en-US" sz="1800" dirty="0">
+                <a:cs typeface="B Nazanin" panose="00000400000000000000" pitchFamily="2" charset="-78"/>
+              </a:rPr>
+              <a:t> </a:t>
+            </a:r>
+            <a:r>
+              <a:rPr lang="en-US" sz="1800" dirty="0" err="1">
+                <a:cs typeface="B Nazanin" panose="00000400000000000000" pitchFamily="2" charset="-78"/>
+              </a:rPr>
+              <a:t>مورد</a:t>
+            </a:r>
+            <a:r>
+              <a:rPr lang="en-US" sz="1800" dirty="0">
+                <a:cs typeface="B Nazanin" panose="00000400000000000000" pitchFamily="2" charset="-78"/>
+              </a:rPr>
+              <a:t> </a:t>
+            </a:r>
+            <a:r>
+              <a:rPr lang="en-US" sz="1800" dirty="0" err="1">
+                <a:cs typeface="B Nazanin" panose="00000400000000000000" pitchFamily="2" charset="-78"/>
+              </a:rPr>
+              <a:t>توجه</a:t>
+            </a:r>
+            <a:r>
+              <a:rPr lang="en-US" sz="1800" dirty="0">
+                <a:cs typeface="B Nazanin" panose="00000400000000000000" pitchFamily="2" charset="-78"/>
+              </a:rPr>
+              <a:t> </a:t>
+            </a:r>
+            <a:r>
+              <a:rPr lang="en-US" sz="1800" dirty="0" err="1">
+                <a:cs typeface="B Nazanin" panose="00000400000000000000" pitchFamily="2" charset="-78"/>
+              </a:rPr>
+              <a:t>قرار</a:t>
+            </a:r>
+            <a:r>
+              <a:rPr lang="en-US" sz="1800" dirty="0">
+                <a:cs typeface="B Nazanin" panose="00000400000000000000" pitchFamily="2" charset="-78"/>
+              </a:rPr>
+              <a:t> </a:t>
+            </a:r>
+            <a:r>
+              <a:rPr lang="en-US" sz="1800" dirty="0" err="1">
+                <a:cs typeface="B Nazanin" panose="00000400000000000000" pitchFamily="2" charset="-78"/>
+              </a:rPr>
+              <a:t>می‌گیرد</a:t>
+            </a:r>
+            <a:r>
+              <a:rPr lang="en-US" sz="1800" dirty="0">
+                <a:cs typeface="B Nazanin" panose="00000400000000000000" pitchFamily="2" charset="-78"/>
+              </a:rPr>
+              <a:t>، </a:t>
+            </a:r>
+            <a:r>
+              <a:rPr lang="en-US" sz="1800" dirty="0" err="1">
+                <a:cs typeface="B Nazanin" panose="00000400000000000000" pitchFamily="2" charset="-78"/>
+              </a:rPr>
+              <a:t>عوامل</a:t>
+            </a:r>
+            <a:r>
+              <a:rPr lang="en-US" sz="1800" dirty="0">
+                <a:cs typeface="B Nazanin" panose="00000400000000000000" pitchFamily="2" charset="-78"/>
+              </a:rPr>
+              <a:t> </a:t>
+            </a:r>
+            <a:r>
+              <a:rPr lang="en-US" sz="1800" dirty="0" err="1">
+                <a:cs typeface="B Nazanin" panose="00000400000000000000" pitchFamily="2" charset="-78"/>
+              </a:rPr>
+              <a:t>فعلی</a:t>
+            </a:r>
+            <a:r>
+              <a:rPr lang="en-US" sz="1800" dirty="0">
+                <a:cs typeface="B Nazanin" panose="00000400000000000000" pitchFamily="2" charset="-78"/>
+              </a:rPr>
+              <a:t> </a:t>
+            </a:r>
+            <a:r>
+              <a:rPr lang="en-US" sz="1800" dirty="0" err="1">
+                <a:cs typeface="B Nazanin" panose="00000400000000000000" pitchFamily="2" charset="-78"/>
+              </a:rPr>
+              <a:t>مانند</a:t>
+            </a:r>
+            <a:r>
+              <a:rPr lang="en-US" sz="1800" dirty="0">
+                <a:cs typeface="B Nazanin" panose="00000400000000000000" pitchFamily="2" charset="-78"/>
+              </a:rPr>
+              <a:t> </a:t>
+            </a:r>
+            <a:r>
+              <a:rPr lang="en-US" sz="1800" dirty="0" err="1">
+                <a:cs typeface="B Nazanin" panose="00000400000000000000" pitchFamily="2" charset="-78"/>
+              </a:rPr>
+              <a:t>سیاست‌های</a:t>
+            </a:r>
+            <a:r>
+              <a:rPr lang="en-US" sz="1800" dirty="0">
+                <a:cs typeface="B Nazanin" panose="00000400000000000000" pitchFamily="2" charset="-78"/>
+              </a:rPr>
+              <a:t> </a:t>
+            </a:r>
+            <a:r>
+              <a:rPr lang="en-US" sz="1800" dirty="0" err="1">
+                <a:cs typeface="B Nazanin" panose="00000400000000000000" pitchFamily="2" charset="-78"/>
+              </a:rPr>
+              <a:t>پولی</a:t>
+            </a:r>
+            <a:r>
+              <a:rPr lang="en-US" sz="1800" dirty="0">
+                <a:cs typeface="B Nazanin" panose="00000400000000000000" pitchFamily="2" charset="-78"/>
+              </a:rPr>
+              <a:t> </a:t>
+            </a:r>
+            <a:r>
+              <a:rPr lang="en-US" sz="1800" dirty="0" err="1">
+                <a:cs typeface="B Nazanin" panose="00000400000000000000" pitchFamily="2" charset="-78"/>
+              </a:rPr>
+              <a:t>آمریکا</a:t>
+            </a:r>
+            <a:r>
+              <a:rPr lang="en-US" sz="1800" dirty="0">
+                <a:cs typeface="B Nazanin" panose="00000400000000000000" pitchFamily="2" charset="-78"/>
+              </a:rPr>
+              <a:t> </a:t>
+            </a:r>
+            <a:r>
+              <a:rPr lang="en-US" sz="1800" dirty="0" err="1">
+                <a:cs typeface="B Nazanin" panose="00000400000000000000" pitchFamily="2" charset="-78"/>
+              </a:rPr>
+              <a:t>در</a:t>
+            </a:r>
+            <a:r>
+              <a:rPr lang="en-US" sz="1800" dirty="0">
+                <a:cs typeface="B Nazanin" panose="00000400000000000000" pitchFamily="2" charset="-78"/>
+              </a:rPr>
+              <a:t> </a:t>
+            </a:r>
+            <a:r>
+              <a:rPr lang="en-US" sz="1800" dirty="0" err="1">
+                <a:cs typeface="B Nazanin" panose="00000400000000000000" pitchFamily="2" charset="-78"/>
+              </a:rPr>
+              <a:t>حال</a:t>
+            </a:r>
+            <a:r>
+              <a:rPr lang="en-US" sz="1800" dirty="0">
+                <a:cs typeface="B Nazanin" panose="00000400000000000000" pitchFamily="2" charset="-78"/>
+              </a:rPr>
+              <a:t> </a:t>
+            </a:r>
+            <a:r>
+              <a:rPr lang="en-US" sz="1800" dirty="0" err="1">
+                <a:cs typeface="B Nazanin" panose="00000400000000000000" pitchFamily="2" charset="-78"/>
+              </a:rPr>
+              <a:t>حاضر</a:t>
+            </a:r>
+            <a:r>
+              <a:rPr lang="en-US" sz="1800" dirty="0">
+                <a:cs typeface="B Nazanin" panose="00000400000000000000" pitchFamily="2" charset="-78"/>
+              </a:rPr>
+              <a:t> </a:t>
+            </a:r>
+            <a:r>
+              <a:rPr lang="en-US" sz="1800" dirty="0" err="1">
+                <a:cs typeface="B Nazanin" panose="00000400000000000000" pitchFamily="2" charset="-78"/>
+              </a:rPr>
+              <a:t>بر</a:t>
+            </a:r>
+            <a:r>
+              <a:rPr lang="en-US" sz="1800" dirty="0">
+                <a:cs typeface="B Nazanin" panose="00000400000000000000" pitchFamily="2" charset="-78"/>
+              </a:rPr>
+              <a:t> </a:t>
+            </a:r>
+            <a:r>
+              <a:rPr lang="en-US" sz="1800" dirty="0" err="1">
+                <a:cs typeface="B Nazanin" panose="00000400000000000000" pitchFamily="2" charset="-78"/>
+              </a:rPr>
+              <a:t>آن</a:t>
+            </a:r>
+            <a:r>
+              <a:rPr lang="en-US" sz="1800" dirty="0">
+                <a:cs typeface="B Nazanin" panose="00000400000000000000" pitchFamily="2" charset="-78"/>
+              </a:rPr>
+              <a:t> </a:t>
+            </a:r>
+            <a:r>
+              <a:rPr lang="en-US" sz="1800" dirty="0" err="1">
+                <a:cs typeface="B Nazanin" panose="00000400000000000000" pitchFamily="2" charset="-78"/>
+              </a:rPr>
+              <a:t>غلبه</a:t>
+            </a:r>
+            <a:r>
+              <a:rPr lang="en-US" sz="1800" dirty="0">
+                <a:cs typeface="B Nazanin" panose="00000400000000000000" pitchFamily="2" charset="-78"/>
+              </a:rPr>
+              <a:t> </a:t>
+            </a:r>
+            <a:r>
+              <a:rPr lang="en-US" sz="1800" dirty="0" err="1">
+                <a:cs typeface="B Nazanin" panose="00000400000000000000" pitchFamily="2" charset="-78"/>
+              </a:rPr>
+              <a:t>کرده‌اند</a:t>
+            </a:r>
+            <a:r>
+              <a:rPr lang="en-US" sz="1800" dirty="0">
+                <a:cs typeface="B Nazanin" panose="00000400000000000000" pitchFamily="2" charset="-78"/>
+              </a:rPr>
+              <a:t>.</a:t>
+            </a:r>
+          </a:p>
+          <a:p>
+            <a:pPr algn="r" rtl="1"/>
+            <a:r>
+              <a:rPr lang="en-US" sz="1800" b="1" dirty="0" err="1">
+                <a:cs typeface="B Nazanin" panose="00000400000000000000" pitchFamily="2" charset="-78"/>
+              </a:rPr>
+              <a:t>نکته</a:t>
+            </a:r>
+            <a:r>
+              <a:rPr lang="en-US" sz="1800" b="1" dirty="0">
+                <a:cs typeface="B Nazanin" panose="00000400000000000000" pitchFamily="2" charset="-78"/>
+              </a:rPr>
+              <a:t>:</a:t>
+            </a:r>
+            <a:r>
+              <a:rPr lang="en-US" sz="1800" dirty="0">
+                <a:cs typeface="B Nazanin" panose="00000400000000000000" pitchFamily="2" charset="-78"/>
+              </a:rPr>
+              <a:t> </a:t>
+            </a:r>
+            <a:r>
+              <a:rPr lang="en-US" sz="1800" dirty="0" err="1">
+                <a:cs typeface="B Nazanin" panose="00000400000000000000" pitchFamily="2" charset="-78"/>
+              </a:rPr>
+              <a:t>اطلاعات</a:t>
+            </a:r>
+            <a:r>
+              <a:rPr lang="en-US" sz="1800" dirty="0">
+                <a:cs typeface="B Nazanin" panose="00000400000000000000" pitchFamily="2" charset="-78"/>
+              </a:rPr>
+              <a:t> </a:t>
+            </a:r>
+            <a:r>
+              <a:rPr lang="en-US" sz="1800" dirty="0" err="1">
+                <a:cs typeface="B Nazanin" panose="00000400000000000000" pitchFamily="2" charset="-78"/>
+              </a:rPr>
+              <a:t>ارائه</a:t>
+            </a:r>
+            <a:r>
+              <a:rPr lang="en-US" sz="1800" dirty="0">
+                <a:cs typeface="B Nazanin" panose="00000400000000000000" pitchFamily="2" charset="-78"/>
+              </a:rPr>
+              <a:t> </a:t>
+            </a:r>
+            <a:r>
+              <a:rPr lang="en-US" sz="1800" dirty="0" err="1">
+                <a:cs typeface="B Nazanin" panose="00000400000000000000" pitchFamily="2" charset="-78"/>
+              </a:rPr>
+              <a:t>شده</a:t>
+            </a:r>
+            <a:r>
+              <a:rPr lang="en-US" sz="1800" dirty="0">
+                <a:cs typeface="B Nazanin" panose="00000400000000000000" pitchFamily="2" charset="-78"/>
+              </a:rPr>
+              <a:t> </a:t>
+            </a:r>
+            <a:r>
+              <a:rPr lang="en-US" sz="1800" dirty="0" err="1">
+                <a:cs typeface="B Nazanin" panose="00000400000000000000" pitchFamily="2" charset="-78"/>
+              </a:rPr>
+              <a:t>بر</a:t>
+            </a:r>
+            <a:r>
+              <a:rPr lang="en-US" sz="1800" dirty="0">
+                <a:cs typeface="B Nazanin" panose="00000400000000000000" pitchFamily="2" charset="-78"/>
+              </a:rPr>
+              <a:t> </a:t>
+            </a:r>
+            <a:r>
+              <a:rPr lang="en-US" sz="1800" dirty="0" err="1">
+                <a:cs typeface="B Nazanin" panose="00000400000000000000" pitchFamily="2" charset="-78"/>
+              </a:rPr>
+              <a:t>اساس</a:t>
+            </a:r>
+            <a:r>
+              <a:rPr lang="en-US" sz="1800" dirty="0">
+                <a:cs typeface="B Nazanin" panose="00000400000000000000" pitchFamily="2" charset="-78"/>
+              </a:rPr>
+              <a:t> داده‌های </a:t>
+            </a:r>
+            <a:r>
+              <a:rPr lang="en-US" sz="1800" dirty="0" err="1">
+                <a:cs typeface="B Nazanin" panose="00000400000000000000" pitchFamily="2" charset="-78"/>
+              </a:rPr>
+              <a:t>موجود</a:t>
+            </a:r>
+            <a:r>
+              <a:rPr lang="en-US" sz="1800" dirty="0">
+                <a:cs typeface="B Nazanin" panose="00000400000000000000" pitchFamily="2" charset="-78"/>
+              </a:rPr>
+              <a:t> </a:t>
+            </a:r>
+            <a:r>
+              <a:rPr lang="en-US" sz="1800" dirty="0" err="1">
+                <a:cs typeface="B Nazanin" panose="00000400000000000000" pitchFamily="2" charset="-78"/>
+              </a:rPr>
+              <a:t>است</a:t>
+            </a:r>
+            <a:r>
+              <a:rPr lang="en-US" sz="1800" dirty="0">
+                <a:cs typeface="B Nazanin" panose="00000400000000000000" pitchFamily="2" charset="-78"/>
+              </a:rPr>
+              <a:t> و </a:t>
+            </a:r>
+            <a:r>
+              <a:rPr lang="en-US" sz="1800" dirty="0" err="1">
+                <a:cs typeface="B Nazanin" panose="00000400000000000000" pitchFamily="2" charset="-78"/>
+              </a:rPr>
+              <a:t>بازار</a:t>
+            </a:r>
+            <a:r>
+              <a:rPr lang="en-US" sz="1800" dirty="0">
+                <a:cs typeface="B Nazanin" panose="00000400000000000000" pitchFamily="2" charset="-78"/>
+              </a:rPr>
+              <a:t> </a:t>
+            </a:r>
+            <a:r>
+              <a:rPr lang="en-US" sz="1800" dirty="0" err="1">
+                <a:cs typeface="B Nazanin" panose="00000400000000000000" pitchFamily="2" charset="-78"/>
+              </a:rPr>
+              <a:t>طلا</a:t>
+            </a:r>
+            <a:r>
+              <a:rPr lang="en-US" sz="1800" dirty="0">
+                <a:cs typeface="B Nazanin" panose="00000400000000000000" pitchFamily="2" charset="-78"/>
+              </a:rPr>
+              <a:t> </a:t>
+            </a:r>
+            <a:r>
+              <a:rPr lang="en-US" sz="1800" dirty="0" err="1">
+                <a:cs typeface="B Nazanin" panose="00000400000000000000" pitchFamily="2" charset="-78"/>
+              </a:rPr>
+              <a:t>می‌تواند</a:t>
+            </a:r>
+            <a:r>
+              <a:rPr lang="en-US" sz="1800" dirty="0">
+                <a:cs typeface="B Nazanin" panose="00000400000000000000" pitchFamily="2" charset="-78"/>
+              </a:rPr>
+              <a:t> </a:t>
+            </a:r>
+            <a:r>
+              <a:rPr lang="en-US" sz="1800" dirty="0" err="1">
+                <a:cs typeface="B Nazanin" panose="00000400000000000000" pitchFamily="2" charset="-78"/>
+              </a:rPr>
+              <a:t>به</a:t>
+            </a:r>
+            <a:r>
+              <a:rPr lang="en-US" sz="1800" dirty="0">
+                <a:cs typeface="B Nazanin" panose="00000400000000000000" pitchFamily="2" charset="-78"/>
+              </a:rPr>
+              <a:t> </a:t>
+            </a:r>
+            <a:r>
+              <a:rPr lang="en-US" sz="1800" dirty="0" err="1">
+                <a:cs typeface="B Nazanin" panose="00000400000000000000" pitchFamily="2" charset="-78"/>
+              </a:rPr>
+              <a:t>سرعت</a:t>
+            </a:r>
+            <a:r>
+              <a:rPr lang="en-US" sz="1800" dirty="0">
+                <a:cs typeface="B Nazanin" panose="00000400000000000000" pitchFamily="2" charset="-78"/>
+              </a:rPr>
+              <a:t> </a:t>
+            </a:r>
+            <a:r>
+              <a:rPr lang="en-US" sz="1800" dirty="0" err="1">
+                <a:cs typeface="B Nazanin" panose="00000400000000000000" pitchFamily="2" charset="-78"/>
+              </a:rPr>
+              <a:t>تغییر</a:t>
+            </a:r>
+            <a:r>
+              <a:rPr lang="en-US" sz="1800" dirty="0">
+                <a:cs typeface="B Nazanin" panose="00000400000000000000" pitchFamily="2" charset="-78"/>
+              </a:rPr>
+              <a:t> </a:t>
+            </a:r>
+            <a:r>
+              <a:rPr lang="en-US" sz="1800" dirty="0" err="1">
+                <a:cs typeface="B Nazanin" panose="00000400000000000000" pitchFamily="2" charset="-78"/>
+              </a:rPr>
+              <a:t>کند</a:t>
+            </a:r>
+            <a:r>
+              <a:rPr lang="en-US" sz="1800" dirty="0">
+                <a:cs typeface="B Nazanin" panose="00000400000000000000" pitchFamily="2" charset="-78"/>
+              </a:rPr>
+              <a:t>.</a:t>
+            </a:r>
+          </a:p>
+          <a:p>
+            <a:pPr algn="r" rtl="1"/>
+            <a:endParaRPr lang="en-US" sz="1800" dirty="0">
+              <a:cs typeface="B Nazanin" panose="00000400000000000000" pitchFamily="2" charset="-78"/>
+            </a:endParaRPr>
           </a:p>
         </p:txBody>
       </p:sp>
@@ -4053,7 +7264,7 @@
           <p:cNvPr id="4" name="Slide Number Placeholder 3">
             <a:extLst>
               <a:ext uri="{FF2B5EF4-FFF2-40B4-BE49-F238E27FC236}">
-                <a16:creationId xmlns:a16="http://schemas.microsoft.com/office/drawing/2014/main" id="{0E7574C7-EF11-D8FC-AB70-E1024E75B036}"/>
+                <a16:creationId xmlns:a16="http://schemas.microsoft.com/office/drawing/2014/main" id="{A5A26FDA-14DE-02AE-D051-B0ABB8E36EF3}"/>
               </a:ext>
             </a:extLst>
           </p:cNvPr>
@@ -4078,6 +7289,11 @@
         </p:txBody>
       </p:sp>
     </p:spTree>
+    <p:extLst>
+      <p:ext uri="{BB962C8B-B14F-4D97-AF65-F5344CB8AC3E}">
+        <p14:creationId xmlns:p14="http://schemas.microsoft.com/office/powerpoint/2010/main" val="4185059661"/>
+      </p:ext>
+    </p:extLst>
   </p:cSld>
   <p:clrMapOvr>
     <a:masterClrMapping/>
@@ -4118,6 +7334,291 @@
           <a:lstStyle/>
           <a:p>
             <a:r>
+              <a:t>Challenges &amp; Solutions</a:t>
+            </a:r>
+          </a:p>
+        </p:txBody>
+      </p:sp>
+      <p:sp>
+        <p:nvSpPr>
+          <p:cNvPr id="3" name="Content Placeholder 2"/>
+          <p:cNvSpPr>
+            <a:spLocks noGrp="1"/>
+          </p:cNvSpPr>
+          <p:nvPr>
+            <p:ph idx="1"/>
+          </p:nvPr>
+        </p:nvSpPr>
+        <p:spPr/>
+        <p:txBody>
+          <a:bodyPr/>
+          <a:lstStyle/>
+          <a:p>
+            <a:r>
+              <a:rPr dirty="0"/>
+              <a:t>API rate limits </a:t>
+            </a:r>
+            <a:r>
+              <a:rPr lang="en-US" dirty="0">
+                <a:solidFill>
+                  <a:srgbClr val="FF0000"/>
+                </a:solidFill>
+              </a:rPr>
+              <a:t>→</a:t>
+            </a:r>
+            <a:r>
+              <a:rPr dirty="0"/>
+              <a:t> Alpha Vantage</a:t>
+            </a:r>
+          </a:p>
+          <a:p>
+            <a:r>
+              <a:rPr dirty="0"/>
+              <a:t>Gemini quota limits </a:t>
+            </a:r>
+            <a:r>
+              <a:rPr lang="en-US" dirty="0">
+                <a:solidFill>
+                  <a:srgbClr val="FF0000"/>
+                </a:solidFill>
+              </a:rPr>
+              <a:t>→</a:t>
+            </a:r>
+            <a:r>
+              <a:rPr dirty="0"/>
+              <a:t> Retry/Fallback</a:t>
+            </a:r>
+          </a:p>
+          <a:p>
+            <a:r>
+              <a:rPr dirty="0"/>
+              <a:t>History persistence </a:t>
+            </a:r>
+            <a:r>
+              <a:rPr dirty="0">
+                <a:solidFill>
+                  <a:srgbClr val="FF0000"/>
+                </a:solidFill>
+              </a:rPr>
+              <a:t>→</a:t>
+            </a:r>
+            <a:r>
+              <a:rPr dirty="0"/>
+              <a:t> JSON storage</a:t>
+            </a:r>
+            <a:endParaRPr lang="en-US" dirty="0"/>
+          </a:p>
+          <a:p>
+            <a:r>
+              <a:rPr lang="en-US" dirty="0"/>
+              <a:t>Sanction Restrictions </a:t>
+            </a:r>
+            <a:r>
+              <a:rPr lang="en-US" dirty="0">
+                <a:solidFill>
+                  <a:srgbClr val="FF0000"/>
+                </a:solidFill>
+              </a:rPr>
+              <a:t>→ </a:t>
+            </a:r>
+            <a:r>
+              <a:rPr lang="en-US" dirty="0"/>
+              <a:t>VPN</a:t>
+            </a:r>
+            <a:endParaRPr dirty="0"/>
+          </a:p>
+        </p:txBody>
+      </p:sp>
+      <p:sp>
+        <p:nvSpPr>
+          <p:cNvPr id="5" name="Slide Number Placeholder 4">
+            <a:extLst>
+              <a:ext uri="{FF2B5EF4-FFF2-40B4-BE49-F238E27FC236}">
+                <a16:creationId xmlns:a16="http://schemas.microsoft.com/office/drawing/2014/main" id="{6EABDA5C-A6DE-69AF-DD47-44E6C4EF6305}"/>
+              </a:ext>
+            </a:extLst>
+          </p:cNvPr>
+          <p:cNvSpPr>
+            <a:spLocks noGrp="1"/>
+          </p:cNvSpPr>
+          <p:nvPr>
+            <p:ph type="sldNum" sz="quarter" idx="12"/>
+          </p:nvPr>
+        </p:nvSpPr>
+        <p:spPr/>
+        <p:txBody>
+          <a:bodyPr/>
+          <a:lstStyle/>
+          <a:p>
+            <a:fld id="{C1FF6DA9-008F-8B48-92A6-B652298478BF}" type="slidenum">
+              <a:rPr lang="en-US" smtClean="0"/>
+              <a:t>14</a:t>
+            </a:fld>
+            <a:endParaRPr lang="en-US"/>
+          </a:p>
+        </p:txBody>
+      </p:sp>
+    </p:spTree>
+  </p:cSld>
+  <p:clrMapOvr>
+    <a:masterClrMapping/>
+  </p:clrMapOvr>
+</p:sld>
+</file>
+
+<file path=ppt/slides/slide15.xml><?xml version="1.0" encoding="utf-8"?>
+<p:sld xmlns:a="http://schemas.openxmlformats.org/drawingml/2006/main" xmlns:r="http://schemas.openxmlformats.org/officeDocument/2006/relationships" xmlns:p="http://schemas.openxmlformats.org/presentationml/2006/main">
+  <p:cSld>
+    <p:spTree>
+      <p:nvGrpSpPr>
+        <p:cNvPr id="1" name=""/>
+        <p:cNvGrpSpPr/>
+        <p:nvPr/>
+      </p:nvGrpSpPr>
+      <p:grpSpPr>
+        <a:xfrm>
+          <a:off x="0" y="0"/>
+          <a:ext cx="0" cy="0"/>
+          <a:chOff x="0" y="0"/>
+          <a:chExt cx="0" cy="0"/>
+        </a:xfrm>
+      </p:grpSpPr>
+      <p:sp>
+        <p:nvSpPr>
+          <p:cNvPr id="2" name="Title 1"/>
+          <p:cNvSpPr>
+            <a:spLocks noGrp="1"/>
+          </p:cNvSpPr>
+          <p:nvPr>
+            <p:ph type="title"/>
+          </p:nvPr>
+        </p:nvSpPr>
+        <p:spPr/>
+        <p:txBody>
+          <a:bodyPr/>
+          <a:lstStyle/>
+          <a:p>
+            <a:r>
+              <a:t>Future Improvements</a:t>
+            </a:r>
+          </a:p>
+        </p:txBody>
+      </p:sp>
+      <p:sp>
+        <p:nvSpPr>
+          <p:cNvPr id="3" name="Content Placeholder 2"/>
+          <p:cNvSpPr>
+            <a:spLocks noGrp="1"/>
+          </p:cNvSpPr>
+          <p:nvPr>
+            <p:ph idx="1"/>
+          </p:nvPr>
+        </p:nvSpPr>
+        <p:spPr/>
+        <p:txBody>
+          <a:bodyPr/>
+          <a:lstStyle/>
+          <a:p>
+            <a:r>
+              <a:rPr dirty="0"/>
+              <a:t>Technical indicators</a:t>
+            </a:r>
+            <a:r>
+              <a:rPr lang="en-US" dirty="0"/>
+              <a:t> (MA, RSI, MACD, …)</a:t>
+            </a:r>
+            <a:endParaRPr dirty="0"/>
+          </a:p>
+          <a:p>
+            <a:r>
+              <a:rPr dirty="0"/>
+              <a:t>Sentiment analysis</a:t>
+            </a:r>
+          </a:p>
+          <a:p>
+            <a:r>
+              <a:rPr dirty="0"/>
+              <a:t>Multi-agent architecture</a:t>
+            </a:r>
+          </a:p>
+          <a:p>
+            <a:r>
+              <a:rPr dirty="0"/>
+              <a:t>Portfolio recommendations</a:t>
+            </a:r>
+          </a:p>
+        </p:txBody>
+      </p:sp>
+      <p:sp>
+        <p:nvSpPr>
+          <p:cNvPr id="4" name="Slide Number Placeholder 3">
+            <a:extLst>
+              <a:ext uri="{FF2B5EF4-FFF2-40B4-BE49-F238E27FC236}">
+                <a16:creationId xmlns:a16="http://schemas.microsoft.com/office/drawing/2014/main" id="{0E7574C7-EF11-D8FC-AB70-E1024E75B036}"/>
+              </a:ext>
+            </a:extLst>
+          </p:cNvPr>
+          <p:cNvSpPr>
+            <a:spLocks noGrp="1"/>
+          </p:cNvSpPr>
+          <p:nvPr>
+            <p:ph type="sldNum" sz="quarter" idx="12"/>
+          </p:nvPr>
+        </p:nvSpPr>
+        <p:spPr/>
+        <p:txBody>
+          <a:bodyPr/>
+          <a:lstStyle/>
+          <a:p>
+            <a:fld id="{C1FF6DA9-008F-8B48-92A6-B652298478BF}" type="slidenum">
+              <a:rPr lang="en-US" smtClean="0"/>
+              <a:t>15</a:t>
+            </a:fld>
+            <a:endParaRPr lang="en-US"/>
+          </a:p>
+        </p:txBody>
+      </p:sp>
+    </p:spTree>
+  </p:cSld>
+  <p:clrMapOvr>
+    <a:masterClrMapping/>
+  </p:clrMapOvr>
+</p:sld>
+</file>
+
+<file path=ppt/slides/slide16.xml><?xml version="1.0" encoding="utf-8"?>
+<p:sld xmlns:a="http://schemas.openxmlformats.org/drawingml/2006/main" xmlns:r="http://schemas.openxmlformats.org/officeDocument/2006/relationships" xmlns:p="http://schemas.openxmlformats.org/presentationml/2006/main">
+  <p:cSld>
+    <p:spTree>
+      <p:nvGrpSpPr>
+        <p:cNvPr id="1" name=""/>
+        <p:cNvGrpSpPr/>
+        <p:nvPr/>
+      </p:nvGrpSpPr>
+      <p:grpSpPr>
+        <a:xfrm>
+          <a:off x="0" y="0"/>
+          <a:ext cx="0" cy="0"/>
+          <a:chOff x="0" y="0"/>
+          <a:chExt cx="0" cy="0"/>
+        </a:xfrm>
+      </p:grpSpPr>
+      <p:sp>
+        <p:nvSpPr>
+          <p:cNvPr id="2" name="Title 1"/>
+          <p:cNvSpPr>
+            <a:spLocks noGrp="1"/>
+          </p:cNvSpPr>
+          <p:nvPr>
+            <p:ph type="title"/>
+          </p:nvPr>
+        </p:nvSpPr>
+        <p:spPr/>
+        <p:txBody>
+          <a:bodyPr/>
+          <a:lstStyle/>
+          <a:p>
+            <a:r>
               <a:t>Conclusion</a:t>
             </a:r>
           </a:p>
@@ -4167,7 +7668,7 @@
           <a:p>
             <a:fld id="{C1FF6DA9-008F-8B48-92A6-B652298478BF}" type="slidenum">
               <a:rPr lang="en-US" smtClean="0"/>
-              <a:t>14</a:t>
+              <a:t>16</a:t>
             </a:fld>
             <a:endParaRPr lang="en-US"/>
           </a:p>
@@ -5124,7 +8625,7 @@
             </a:r>
             <a:r>
               <a:rPr lang="en-US" dirty="0"/>
-              <a:t>, model="gemini-2.5-flash"</a:t>
+              <a:t>, model="gemini-2.5-flash-lite"</a:t>
             </a:r>
             <a:endParaRPr dirty="0"/>
           </a:p>
